--- a/figures.pptx
+++ b/figures.pptx
@@ -4,6 +4,9 @@
   <p:sldMasterIdLst>
     <p:sldMasterId id="2147483648" r:id="rId1"/>
   </p:sldMasterIdLst>
+  <p:notesMasterIdLst>
+    <p:notesMasterId r:id="rId3"/>
+  </p:notesMasterIdLst>
   <p:sldIdLst>
     <p:sldId id="256" r:id="rId2"/>
   </p:sldIdLst>
@@ -105,6 +108,439 @@
     </a:lvl9pPr>
   </p:defaultTextStyle>
 </p:presentation>
+</file>
+
+<file path=ppt/notesMasters/notesMaster1.xml><?xml version="1.0" encoding="utf-8"?>
+<p:notesMaster xmlns:a="http://schemas.openxmlformats.org/drawingml/2006/main" xmlns:r="http://schemas.openxmlformats.org/officeDocument/2006/relationships" xmlns:p="http://schemas.openxmlformats.org/presentationml/2006/main">
+  <p:cSld>
+    <p:bg>
+      <p:bgRef idx="1001">
+        <a:schemeClr val="bg1"/>
+      </p:bgRef>
+    </p:bg>
+    <p:spTree>
+      <p:nvGrpSpPr>
+        <p:cNvPr id="1" name=""/>
+        <p:cNvGrpSpPr/>
+        <p:nvPr/>
+      </p:nvGrpSpPr>
+      <p:grpSpPr>
+        <a:xfrm>
+          <a:off x="0" y="0"/>
+          <a:ext cx="0" cy="0"/>
+          <a:chOff x="0" y="0"/>
+          <a:chExt cx="0" cy="0"/>
+        </a:xfrm>
+      </p:grpSpPr>
+      <p:sp>
+        <p:nvSpPr>
+          <p:cNvPr id="2" name="页眉占位符 1"/>
+          <p:cNvSpPr>
+            <a:spLocks noGrp="1"/>
+          </p:cNvSpPr>
+          <p:nvPr>
+            <p:ph type="hdr" sz="quarter"/>
+          </p:nvPr>
+        </p:nvSpPr>
+        <p:spPr>
+          <a:xfrm>
+            <a:off x="0" y="0"/>
+            <a:ext cx="2971800" cy="458788"/>
+          </a:xfrm>
+          <a:prstGeom prst="rect">
+            <a:avLst/>
+          </a:prstGeom>
+        </p:spPr>
+        <p:txBody>
+          <a:bodyPr vert="horz" lIns="91440" tIns="45720" rIns="91440" bIns="45720" rtlCol="0"/>
+          <a:lstStyle>
+            <a:lvl1pPr algn="l">
+              <a:defRPr sz="1200"/>
+            </a:lvl1pPr>
+          </a:lstStyle>
+          <a:p>
+            <a:endParaRPr kumimoji="1" lang="zh-CN" altLang="en-US"/>
+          </a:p>
+        </p:txBody>
+      </p:sp>
+      <p:sp>
+        <p:nvSpPr>
+          <p:cNvPr id="3" name="日期占位符 2"/>
+          <p:cNvSpPr>
+            <a:spLocks noGrp="1"/>
+          </p:cNvSpPr>
+          <p:nvPr>
+            <p:ph type="dt" idx="1"/>
+          </p:nvPr>
+        </p:nvSpPr>
+        <p:spPr>
+          <a:xfrm>
+            <a:off x="3884613" y="0"/>
+            <a:ext cx="2971800" cy="458788"/>
+          </a:xfrm>
+          <a:prstGeom prst="rect">
+            <a:avLst/>
+          </a:prstGeom>
+        </p:spPr>
+        <p:txBody>
+          <a:bodyPr vert="horz" lIns="91440" tIns="45720" rIns="91440" bIns="45720" rtlCol="0"/>
+          <a:lstStyle>
+            <a:lvl1pPr algn="r">
+              <a:defRPr sz="1200"/>
+            </a:lvl1pPr>
+          </a:lstStyle>
+          <a:p>
+            <a:fld id="{02E74A51-439E-D244-9B3D-7A0C4135E066}" type="datetimeFigureOut">
+              <a:rPr kumimoji="1" lang="zh-CN" altLang="en-US" smtClean="0"/>
+              <a:t>2026/6/6</a:t>
+            </a:fld>
+            <a:endParaRPr kumimoji="1" lang="zh-CN" altLang="en-US"/>
+          </a:p>
+        </p:txBody>
+      </p:sp>
+      <p:sp>
+        <p:nvSpPr>
+          <p:cNvPr id="4" name="幻灯片图像占位符 3"/>
+          <p:cNvSpPr>
+            <a:spLocks noGrp="1" noRot="1" noChangeAspect="1"/>
+          </p:cNvSpPr>
+          <p:nvPr>
+            <p:ph type="sldImg" idx="2"/>
+          </p:nvPr>
+        </p:nvSpPr>
+        <p:spPr>
+          <a:xfrm>
+            <a:off x="685800" y="1143000"/>
+            <a:ext cx="5486400" cy="3086100"/>
+          </a:xfrm>
+          <a:prstGeom prst="rect">
+            <a:avLst/>
+          </a:prstGeom>
+          <a:noFill/>
+          <a:ln w="12700">
+            <a:solidFill>
+              <a:prstClr val="black"/>
+            </a:solidFill>
+          </a:ln>
+        </p:spPr>
+        <p:txBody>
+          <a:bodyPr vert="horz" lIns="91440" tIns="45720" rIns="91440" bIns="45720" rtlCol="0" anchor="ctr"/>
+          <a:lstStyle/>
+          <a:p>
+            <a:endParaRPr lang="zh-CN" altLang="en-US"/>
+          </a:p>
+        </p:txBody>
+      </p:sp>
+      <p:sp>
+        <p:nvSpPr>
+          <p:cNvPr id="5" name="备注占位符 4"/>
+          <p:cNvSpPr>
+            <a:spLocks noGrp="1"/>
+          </p:cNvSpPr>
+          <p:nvPr>
+            <p:ph type="body" sz="quarter" idx="3"/>
+          </p:nvPr>
+        </p:nvSpPr>
+        <p:spPr>
+          <a:xfrm>
+            <a:off x="685800" y="4400550"/>
+            <a:ext cx="5486400" cy="3600450"/>
+          </a:xfrm>
+          <a:prstGeom prst="rect">
+            <a:avLst/>
+          </a:prstGeom>
+        </p:spPr>
+        <p:txBody>
+          <a:bodyPr vert="horz" lIns="91440" tIns="45720" rIns="91440" bIns="45720" rtlCol="0"/>
+          <a:lstStyle/>
+          <a:p>
+            <a:pPr lvl="0"/>
+            <a:r>
+              <a:rPr kumimoji="1" lang="zh-CN" altLang="en-US"/>
+              <a:t>单击此处编辑母版文本样式</a:t>
+            </a:r>
+          </a:p>
+          <a:p>
+            <a:pPr lvl="1"/>
+            <a:r>
+              <a:rPr kumimoji="1" lang="zh-CN" altLang="en-US"/>
+              <a:t>二级</a:t>
+            </a:r>
+          </a:p>
+          <a:p>
+            <a:pPr lvl="2"/>
+            <a:r>
+              <a:rPr kumimoji="1" lang="zh-CN" altLang="en-US"/>
+              <a:t>三级</a:t>
+            </a:r>
+          </a:p>
+          <a:p>
+            <a:pPr lvl="3"/>
+            <a:r>
+              <a:rPr kumimoji="1" lang="zh-CN" altLang="en-US"/>
+              <a:t>四级</a:t>
+            </a:r>
+          </a:p>
+          <a:p>
+            <a:pPr lvl="4"/>
+            <a:r>
+              <a:rPr kumimoji="1" lang="zh-CN" altLang="en-US"/>
+              <a:t>五级</a:t>
+            </a:r>
+          </a:p>
+        </p:txBody>
+      </p:sp>
+      <p:sp>
+        <p:nvSpPr>
+          <p:cNvPr id="6" name="页脚占位符 5"/>
+          <p:cNvSpPr>
+            <a:spLocks noGrp="1"/>
+          </p:cNvSpPr>
+          <p:nvPr>
+            <p:ph type="ftr" sz="quarter" idx="4"/>
+          </p:nvPr>
+        </p:nvSpPr>
+        <p:spPr>
+          <a:xfrm>
+            <a:off x="0" y="8685213"/>
+            <a:ext cx="2971800" cy="458787"/>
+          </a:xfrm>
+          <a:prstGeom prst="rect">
+            <a:avLst/>
+          </a:prstGeom>
+        </p:spPr>
+        <p:txBody>
+          <a:bodyPr vert="horz" lIns="91440" tIns="45720" rIns="91440" bIns="45720" rtlCol="0" anchor="b"/>
+          <a:lstStyle>
+            <a:lvl1pPr algn="l">
+              <a:defRPr sz="1200"/>
+            </a:lvl1pPr>
+          </a:lstStyle>
+          <a:p>
+            <a:endParaRPr kumimoji="1" lang="zh-CN" altLang="en-US"/>
+          </a:p>
+        </p:txBody>
+      </p:sp>
+      <p:sp>
+        <p:nvSpPr>
+          <p:cNvPr id="7" name="灯片编号占位符 6"/>
+          <p:cNvSpPr>
+            <a:spLocks noGrp="1"/>
+          </p:cNvSpPr>
+          <p:nvPr>
+            <p:ph type="sldNum" sz="quarter" idx="5"/>
+          </p:nvPr>
+        </p:nvSpPr>
+        <p:spPr>
+          <a:xfrm>
+            <a:off x="3884613" y="8685213"/>
+            <a:ext cx="2971800" cy="458787"/>
+          </a:xfrm>
+          <a:prstGeom prst="rect">
+            <a:avLst/>
+          </a:prstGeom>
+        </p:spPr>
+        <p:txBody>
+          <a:bodyPr vert="horz" lIns="91440" tIns="45720" rIns="91440" bIns="45720" rtlCol="0" anchor="b"/>
+          <a:lstStyle>
+            <a:lvl1pPr algn="r">
+              <a:defRPr sz="1200"/>
+            </a:lvl1pPr>
+          </a:lstStyle>
+          <a:p>
+            <a:fld id="{C3E7DD16-F395-984D-B255-73F7D65BCDA2}" type="slidenum">
+              <a:rPr kumimoji="1" lang="zh-CN" altLang="en-US" smtClean="0"/>
+              <a:t>‹#›</a:t>
+            </a:fld>
+            <a:endParaRPr kumimoji="1" lang="zh-CN" altLang="en-US"/>
+          </a:p>
+        </p:txBody>
+      </p:sp>
+    </p:spTree>
+    <p:extLst>
+      <p:ext uri="{BB962C8B-B14F-4D97-AF65-F5344CB8AC3E}">
+        <p14:creationId xmlns:p14="http://schemas.microsoft.com/office/powerpoint/2010/main" val="1029197335"/>
+      </p:ext>
+    </p:extLst>
+  </p:cSld>
+  <p:clrMap bg1="lt1" tx1="dk1" bg2="lt2" tx2="dk2" accent1="accent1" accent2="accent2" accent3="accent3" accent4="accent4" accent5="accent5" accent6="accent6" hlink="hlink" folHlink="folHlink"/>
+  <p:notesStyle>
+    <a:lvl1pPr marL="0" algn="l" defTabSz="914400" rtl="0" eaLnBrk="1" latinLnBrk="0" hangingPunct="1">
+      <a:defRPr sz="1200" kern="1200">
+        <a:solidFill>
+          <a:schemeClr val="tx1"/>
+        </a:solidFill>
+        <a:latin typeface="+mn-lt"/>
+        <a:ea typeface="+mn-ea"/>
+        <a:cs typeface="+mn-cs"/>
+      </a:defRPr>
+    </a:lvl1pPr>
+    <a:lvl2pPr marL="457200" algn="l" defTabSz="914400" rtl="0" eaLnBrk="1" latinLnBrk="0" hangingPunct="1">
+      <a:defRPr sz="1200" kern="1200">
+        <a:solidFill>
+          <a:schemeClr val="tx1"/>
+        </a:solidFill>
+        <a:latin typeface="+mn-lt"/>
+        <a:ea typeface="+mn-ea"/>
+        <a:cs typeface="+mn-cs"/>
+      </a:defRPr>
+    </a:lvl2pPr>
+    <a:lvl3pPr marL="914400" algn="l" defTabSz="914400" rtl="0" eaLnBrk="1" latinLnBrk="0" hangingPunct="1">
+      <a:defRPr sz="1200" kern="1200">
+        <a:solidFill>
+          <a:schemeClr val="tx1"/>
+        </a:solidFill>
+        <a:latin typeface="+mn-lt"/>
+        <a:ea typeface="+mn-ea"/>
+        <a:cs typeface="+mn-cs"/>
+      </a:defRPr>
+    </a:lvl3pPr>
+    <a:lvl4pPr marL="1371600" algn="l" defTabSz="914400" rtl="0" eaLnBrk="1" latinLnBrk="0" hangingPunct="1">
+      <a:defRPr sz="1200" kern="1200">
+        <a:solidFill>
+          <a:schemeClr val="tx1"/>
+        </a:solidFill>
+        <a:latin typeface="+mn-lt"/>
+        <a:ea typeface="+mn-ea"/>
+        <a:cs typeface="+mn-cs"/>
+      </a:defRPr>
+    </a:lvl4pPr>
+    <a:lvl5pPr marL="1828800" algn="l" defTabSz="914400" rtl="0" eaLnBrk="1" latinLnBrk="0" hangingPunct="1">
+      <a:defRPr sz="1200" kern="1200">
+        <a:solidFill>
+          <a:schemeClr val="tx1"/>
+        </a:solidFill>
+        <a:latin typeface="+mn-lt"/>
+        <a:ea typeface="+mn-ea"/>
+        <a:cs typeface="+mn-cs"/>
+      </a:defRPr>
+    </a:lvl5pPr>
+    <a:lvl6pPr marL="2286000" algn="l" defTabSz="914400" rtl="0" eaLnBrk="1" latinLnBrk="0" hangingPunct="1">
+      <a:defRPr sz="1200" kern="1200">
+        <a:solidFill>
+          <a:schemeClr val="tx1"/>
+        </a:solidFill>
+        <a:latin typeface="+mn-lt"/>
+        <a:ea typeface="+mn-ea"/>
+        <a:cs typeface="+mn-cs"/>
+      </a:defRPr>
+    </a:lvl6pPr>
+    <a:lvl7pPr marL="2743200" algn="l" defTabSz="914400" rtl="0" eaLnBrk="1" latinLnBrk="0" hangingPunct="1">
+      <a:defRPr sz="1200" kern="1200">
+        <a:solidFill>
+          <a:schemeClr val="tx1"/>
+        </a:solidFill>
+        <a:latin typeface="+mn-lt"/>
+        <a:ea typeface="+mn-ea"/>
+        <a:cs typeface="+mn-cs"/>
+      </a:defRPr>
+    </a:lvl7pPr>
+    <a:lvl8pPr marL="3200400" algn="l" defTabSz="914400" rtl="0" eaLnBrk="1" latinLnBrk="0" hangingPunct="1">
+      <a:defRPr sz="1200" kern="1200">
+        <a:solidFill>
+          <a:schemeClr val="tx1"/>
+        </a:solidFill>
+        <a:latin typeface="+mn-lt"/>
+        <a:ea typeface="+mn-ea"/>
+        <a:cs typeface="+mn-cs"/>
+      </a:defRPr>
+    </a:lvl8pPr>
+    <a:lvl9pPr marL="3657600" algn="l" defTabSz="914400" rtl="0" eaLnBrk="1" latinLnBrk="0" hangingPunct="1">
+      <a:defRPr sz="1200" kern="1200">
+        <a:solidFill>
+          <a:schemeClr val="tx1"/>
+        </a:solidFill>
+        <a:latin typeface="+mn-lt"/>
+        <a:ea typeface="+mn-ea"/>
+        <a:cs typeface="+mn-cs"/>
+      </a:defRPr>
+    </a:lvl9pPr>
+  </p:notesStyle>
+</p:notesMaster>
+</file>
+
+<file path=ppt/notesSlides/notesSlide1.xml><?xml version="1.0" encoding="utf-8"?>
+<p:notes xmlns:a="http://schemas.openxmlformats.org/drawingml/2006/main" xmlns:r="http://schemas.openxmlformats.org/officeDocument/2006/relationships" xmlns:p="http://schemas.openxmlformats.org/presentationml/2006/main">
+  <p:cSld>
+    <p:spTree>
+      <p:nvGrpSpPr>
+        <p:cNvPr id="1" name=""/>
+        <p:cNvGrpSpPr/>
+        <p:nvPr/>
+      </p:nvGrpSpPr>
+      <p:grpSpPr>
+        <a:xfrm>
+          <a:off x="0" y="0"/>
+          <a:ext cx="0" cy="0"/>
+          <a:chOff x="0" y="0"/>
+          <a:chExt cx="0" cy="0"/>
+        </a:xfrm>
+      </p:grpSpPr>
+      <p:sp>
+        <p:nvSpPr>
+          <p:cNvPr id="2" name="幻灯片图像占位符 1"/>
+          <p:cNvSpPr>
+            <a:spLocks noGrp="1" noRot="1" noChangeAspect="1"/>
+          </p:cNvSpPr>
+          <p:nvPr>
+            <p:ph type="sldImg"/>
+          </p:nvPr>
+        </p:nvSpPr>
+        <p:spPr/>
+      </p:sp>
+      <p:sp>
+        <p:nvSpPr>
+          <p:cNvPr id="3" name="备注占位符 2"/>
+          <p:cNvSpPr>
+            <a:spLocks noGrp="1"/>
+          </p:cNvSpPr>
+          <p:nvPr>
+            <p:ph type="body" idx="1"/>
+          </p:nvPr>
+        </p:nvSpPr>
+        <p:spPr/>
+        <p:txBody>
+          <a:bodyPr/>
+          <a:lstStyle/>
+          <a:p>
+            <a:endParaRPr kumimoji="1" lang="zh-CN" altLang="en-US" dirty="0"/>
+          </a:p>
+        </p:txBody>
+      </p:sp>
+      <p:sp>
+        <p:nvSpPr>
+          <p:cNvPr id="4" name="灯片编号占位符 3"/>
+          <p:cNvSpPr>
+            <a:spLocks noGrp="1"/>
+          </p:cNvSpPr>
+          <p:nvPr>
+            <p:ph type="sldNum" sz="quarter" idx="5"/>
+          </p:nvPr>
+        </p:nvSpPr>
+        <p:spPr/>
+        <p:txBody>
+          <a:bodyPr/>
+          <a:lstStyle/>
+          <a:p>
+            <a:fld id="{C3E7DD16-F395-984D-B255-73F7D65BCDA2}" type="slidenum">
+              <a:rPr kumimoji="1" lang="zh-CN" altLang="en-US" smtClean="0"/>
+              <a:t>1</a:t>
+            </a:fld>
+            <a:endParaRPr kumimoji="1" lang="zh-CN" altLang="en-US"/>
+          </a:p>
+        </p:txBody>
+      </p:sp>
+    </p:spTree>
+    <p:extLst>
+      <p:ext uri="{BB962C8B-B14F-4D97-AF65-F5344CB8AC3E}">
+        <p14:creationId xmlns:p14="http://schemas.microsoft.com/office/powerpoint/2010/main" val="1990736993"/>
+      </p:ext>
+    </p:extLst>
+  </p:cSld>
+  <p:clrMapOvr>
+    <a:masterClrMapping/>
+  </p:clrMapOvr>
+</p:notes>
 </file>
 
 <file path=ppt/slideLayouts/slideLayout1.xml><?xml version="1.0" encoding="utf-8"?>
@@ -3336,7 +3772,7 @@
           <p:nvPr/>
         </p:nvPicPr>
         <p:blipFill>
-          <a:blip r:embed="rId2"/>
+          <a:blip r:embed="rId3"/>
           <a:stretch>
             <a:fillRect/>
           </a:stretch>
@@ -3349,6 +3785,13 @@
           <a:prstGeom prst="rect">
             <a:avLst/>
           </a:prstGeom>
+          <a:ln>
+            <a:solidFill>
+              <a:schemeClr val="accent1">
+                <a:shade val="15000"/>
+              </a:schemeClr>
+            </a:solidFill>
+          </a:ln>
         </p:spPr>
       </p:pic>
       <p:pic>
@@ -3366,7 +3809,7 @@
           <p:nvPr/>
         </p:nvPicPr>
         <p:blipFill>
-          <a:blip r:embed="rId3">
+          <a:blip r:embed="rId4">
             <a:alphaModFix amt="61000"/>
           </a:blip>
           <a:stretch>
@@ -3720,18 +4163,18 @@
         </p:nvSpPr>
         <p:spPr>
           <a:xfrm>
-            <a:off x="1382484" y="1889079"/>
-            <a:ext cx="1072616" cy="713080"/>
+            <a:off x="1376221" y="1878901"/>
+            <a:ext cx="1094537" cy="730178"/>
           </a:xfrm>
           <a:prstGeom prst="rect">
             <a:avLst/>
           </a:prstGeom>
           <a:noFill/>
-          <a:ln w="15875">
+          <a:ln w="25400">
             <a:solidFill>
               <a:srgbClr val="FF7600"/>
             </a:solidFill>
-            <a:prstDash val="dash"/>
+            <a:prstDash val="sysDash"/>
           </a:ln>
         </p:spPr>
         <p:style>
@@ -3774,7 +4217,7 @@
           <p:nvPr/>
         </p:nvPicPr>
         <p:blipFill>
-          <a:blip r:embed="rId2"/>
+          <a:blip r:embed="rId3"/>
           <a:srcRect t="25000" b="24999"/>
           <a:stretch/>
         </p:blipFill>
@@ -3786,6 +4229,13 @@
           <a:prstGeom prst="rect">
             <a:avLst/>
           </a:prstGeom>
+          <a:ln>
+            <a:solidFill>
+              <a:schemeClr val="accent1">
+                <a:shade val="15000"/>
+              </a:schemeClr>
+            </a:solidFill>
+          </a:ln>
         </p:spPr>
       </p:pic>
       <p:cxnSp>
@@ -3797,18 +4247,20 @@
               </a:ext>
             </a:extLst>
           </p:cNvPr>
-          <p:cNvCxnSpPr/>
+          <p:cNvCxnSpPr>
+            <a:cxnSpLocks/>
+          </p:cNvCxnSpPr>
           <p:nvPr/>
         </p:nvCxnSpPr>
         <p:spPr>
           <a:xfrm flipV="1">
-            <a:off x="2461363" y="1597667"/>
-            <a:ext cx="842198" cy="290753"/>
+            <a:off x="2461363" y="1585968"/>
+            <a:ext cx="832577" cy="302452"/>
           </a:xfrm>
           <a:prstGeom prst="line">
             <a:avLst/>
           </a:prstGeom>
-          <a:ln w="15875">
+          <a:ln w="25400">
             <a:solidFill>
               <a:srgbClr val="FF7600"/>
             </a:solidFill>
@@ -3847,12 +4299,12 @@
         <p:spPr>
           <a:xfrm>
             <a:off x="2459798" y="2602158"/>
-            <a:ext cx="837500" cy="284493"/>
+            <a:ext cx="831237" cy="283920"/>
           </a:xfrm>
           <a:prstGeom prst="line">
             <a:avLst/>
           </a:prstGeom>
-          <a:ln w="15875">
+          <a:ln w="25400">
             <a:solidFill>
               <a:srgbClr val="FF7600"/>
             </a:solidFill>
@@ -3928,7 +4380,7 @@
         </p:nvSpPr>
         <p:spPr>
           <a:xfrm>
-            <a:off x="2976156" y="2823661"/>
+            <a:off x="2981223" y="2814375"/>
             <a:ext cx="341760" cy="276999"/>
           </a:xfrm>
           <a:prstGeom prst="rect">
@@ -4468,8 +4920,8 @@
         </p:nvSpPr>
         <p:spPr>
           <a:xfrm>
-            <a:off x="1439837" y="2060951"/>
-            <a:ext cx="982961" cy="369332"/>
+            <a:off x="1423005" y="2060951"/>
+            <a:ext cx="1016625" cy="369332"/>
           </a:xfrm>
           <a:prstGeom prst="rect">
             <a:avLst/>
@@ -4495,7 +4947,7 @@
               <a:rPr kumimoji="1" lang="en-US" altLang="zh-CN" sz="900" dirty="0">
                 <a:latin typeface="Calisto MT" panose="02040603050505030304" pitchFamily="18" charset="0"/>
               </a:rPr>
-              <a:t>Embedding area</a:t>
+              <a:t>Embedding Area</a:t>
             </a:r>
             <a:endParaRPr kumimoji="1" lang="zh-CN" altLang="en-US" sz="900" dirty="0">
               <a:latin typeface="Calisto MT" panose="02040603050505030304" pitchFamily="18" charset="0"/>
@@ -4518,7 +4970,7 @@
           <p:nvPr/>
         </p:nvPicPr>
         <p:blipFill>
-          <a:blip r:embed="rId3">
+          <a:blip r:embed="rId4">
             <a:alphaModFix amt="61000"/>
           </a:blip>
           <a:stretch>
@@ -4527,8 +4979,8 @@
         </p:blipFill>
         <p:spPr>
           <a:xfrm>
-            <a:off x="4487348" y="1591729"/>
-            <a:ext cx="242608" cy="1301503"/>
+            <a:off x="4487348" y="1591730"/>
+            <a:ext cx="242608" cy="1294922"/>
           </a:xfrm>
           <a:prstGeom prst="rect">
             <a:avLst/>
@@ -4550,18 +5002,2524 @@
         </p:nvSpPr>
         <p:spPr>
           <a:xfrm>
-            <a:off x="4487349" y="1591412"/>
-            <a:ext cx="242607" cy="1301502"/>
+            <a:off x="3297298" y="1585968"/>
+            <a:ext cx="1944518" cy="1300683"/>
           </a:xfrm>
           <a:prstGeom prst="rect">
             <a:avLst/>
           </a:prstGeom>
           <a:noFill/>
-          <a:ln w="12700">
+          <a:ln w="25400">
             <a:solidFill>
               <a:srgbClr val="FF7600"/>
             </a:solidFill>
             <a:prstDash val="dash"/>
+          </a:ln>
+        </p:spPr>
+        <p:style>
+          <a:lnRef idx="2">
+            <a:schemeClr val="accent1">
+              <a:shade val="15000"/>
+            </a:schemeClr>
+          </a:lnRef>
+          <a:fillRef idx="1">
+            <a:schemeClr val="accent1"/>
+          </a:fillRef>
+          <a:effectRef idx="0">
+            <a:schemeClr val="accent1"/>
+          </a:effectRef>
+          <a:fontRef idx="minor">
+            <a:schemeClr val="lt1"/>
+          </a:fontRef>
+        </p:style>
+        <p:txBody>
+          <a:bodyPr rtlCol="0" anchor="ctr"/>
+          <a:lstStyle/>
+          <a:p>
+            <a:pPr algn="ctr"/>
+            <a:endParaRPr kumimoji="1" lang="zh-CN" altLang="en-US"/>
+          </a:p>
+        </p:txBody>
+      </p:sp>
+      <p:sp>
+        <p:nvSpPr>
+          <p:cNvPr id="65" name="矩形 64">
+            <a:extLst>
+              <a:ext uri="{FF2B5EF4-FFF2-40B4-BE49-F238E27FC236}">
+                <a16:creationId xmlns:a16="http://schemas.microsoft.com/office/drawing/2014/main" id="{973167EB-68B0-7FC0-FD4B-97B9FF4B4A20}"/>
+              </a:ext>
+            </a:extLst>
+          </p:cNvPr>
+          <p:cNvSpPr/>
+          <p:nvPr/>
+        </p:nvSpPr>
+        <p:spPr>
+          <a:xfrm>
+            <a:off x="5764277" y="1878901"/>
+            <a:ext cx="609474" cy="1079625"/>
+          </a:xfrm>
+          <a:prstGeom prst="rect">
+            <a:avLst/>
+          </a:prstGeom>
+          <a:solidFill>
+            <a:schemeClr val="bg1">
+              <a:lumMod val="85000"/>
+            </a:schemeClr>
+          </a:solidFill>
+          <a:ln w="12700">
+            <a:noFill/>
+          </a:ln>
+        </p:spPr>
+        <p:style>
+          <a:lnRef idx="2">
+            <a:schemeClr val="accent1">
+              <a:shade val="15000"/>
+            </a:schemeClr>
+          </a:lnRef>
+          <a:fillRef idx="1">
+            <a:schemeClr val="accent1"/>
+          </a:fillRef>
+          <a:effectRef idx="0">
+            <a:schemeClr val="accent1"/>
+          </a:effectRef>
+          <a:fontRef idx="minor">
+            <a:schemeClr val="lt1"/>
+          </a:fontRef>
+        </p:style>
+        <p:txBody>
+          <a:bodyPr rtlCol="0" anchor="ctr"/>
+          <a:lstStyle/>
+          <a:p>
+            <a:pPr algn="ctr"/>
+            <a:endParaRPr kumimoji="1" lang="zh-CN" altLang="en-US"/>
+          </a:p>
+        </p:txBody>
+      </p:sp>
+      <p:sp>
+        <p:nvSpPr>
+          <p:cNvPr id="73" name="文本框 72">
+            <a:extLst>
+              <a:ext uri="{FF2B5EF4-FFF2-40B4-BE49-F238E27FC236}">
+                <a16:creationId xmlns:a16="http://schemas.microsoft.com/office/drawing/2014/main" id="{E57117AD-32D8-32EE-F24F-D82BE1115F6A}"/>
+              </a:ext>
+            </a:extLst>
+          </p:cNvPr>
+          <p:cNvSpPr txBox="1"/>
+          <p:nvPr/>
+        </p:nvSpPr>
+        <p:spPr>
+          <a:xfrm>
+            <a:off x="5533516" y="1675778"/>
+            <a:ext cx="290464" cy="215444"/>
+          </a:xfrm>
+          <a:prstGeom prst="rect">
+            <a:avLst/>
+          </a:prstGeom>
+          <a:noFill/>
+        </p:spPr>
+        <p:txBody>
+          <a:bodyPr wrap="none" rtlCol="0">
+            <a:spAutoFit/>
+          </a:bodyPr>
+          <a:lstStyle/>
+          <a:p>
+            <a:r>
+              <a:rPr kumimoji="1" lang="en-US" altLang="zh-CN" sz="800" dirty="0">
+                <a:latin typeface="Calisto MT" panose="02040603050505030304" pitchFamily="18" charset="0"/>
+              </a:rPr>
+              <a:t>60</a:t>
+            </a:r>
+            <a:endParaRPr kumimoji="1" lang="zh-CN" altLang="en-US" sz="800" dirty="0">
+              <a:latin typeface="Calisto MT" panose="02040603050505030304" pitchFamily="18" charset="0"/>
+            </a:endParaRPr>
+          </a:p>
+        </p:txBody>
+      </p:sp>
+      <p:sp>
+        <p:nvSpPr>
+          <p:cNvPr id="74" name="文本框 73">
+            <a:extLst>
+              <a:ext uri="{FF2B5EF4-FFF2-40B4-BE49-F238E27FC236}">
+                <a16:creationId xmlns:a16="http://schemas.microsoft.com/office/drawing/2014/main" id="{19FE7E2C-9B84-FC71-CE64-DF9A093AAD08}"/>
+              </a:ext>
+            </a:extLst>
+          </p:cNvPr>
+          <p:cNvSpPr txBox="1"/>
+          <p:nvPr/>
+        </p:nvSpPr>
+        <p:spPr>
+          <a:xfrm>
+            <a:off x="5524615" y="2931096"/>
+            <a:ext cx="290464" cy="215444"/>
+          </a:xfrm>
+          <a:prstGeom prst="rect">
+            <a:avLst/>
+          </a:prstGeom>
+          <a:noFill/>
+        </p:spPr>
+        <p:txBody>
+          <a:bodyPr wrap="none" rtlCol="0">
+            <a:spAutoFit/>
+          </a:bodyPr>
+          <a:lstStyle/>
+          <a:p>
+            <a:r>
+              <a:rPr kumimoji="1" lang="en-US" altLang="zh-CN" sz="800" dirty="0">
+                <a:latin typeface="Calisto MT" panose="02040603050505030304" pitchFamily="18" charset="0"/>
+              </a:rPr>
+              <a:t>20</a:t>
+            </a:r>
+            <a:endParaRPr kumimoji="1" lang="zh-CN" altLang="en-US" sz="800" dirty="0">
+              <a:latin typeface="Calisto MT" panose="02040603050505030304" pitchFamily="18" charset="0"/>
+            </a:endParaRPr>
+          </a:p>
+        </p:txBody>
+      </p:sp>
+      <p:sp>
+        <p:nvSpPr>
+          <p:cNvPr id="75" name="文本框 74">
+            <a:extLst>
+              <a:ext uri="{FF2B5EF4-FFF2-40B4-BE49-F238E27FC236}">
+                <a16:creationId xmlns:a16="http://schemas.microsoft.com/office/drawing/2014/main" id="{87D1BE1A-98C0-6F05-F72E-C1500F3AB355}"/>
+              </a:ext>
+            </a:extLst>
+          </p:cNvPr>
+          <p:cNvSpPr txBox="1"/>
+          <p:nvPr/>
+        </p:nvSpPr>
+        <p:spPr>
+          <a:xfrm>
+            <a:off x="5604586" y="1346546"/>
+            <a:ext cx="899605" cy="415498"/>
+          </a:xfrm>
+          <a:prstGeom prst="rect">
+            <a:avLst/>
+          </a:prstGeom>
+          <a:noFill/>
+        </p:spPr>
+        <p:txBody>
+          <a:bodyPr wrap="none" rtlCol="0">
+            <a:spAutoFit/>
+          </a:bodyPr>
+          <a:lstStyle/>
+          <a:p>
+            <a:r>
+              <a:rPr kumimoji="1" lang="en-US" altLang="zh-CN" sz="1050" dirty="0">
+                <a:latin typeface="Calisto MT" panose="02040603050505030304" pitchFamily="18" charset="0"/>
+              </a:rPr>
+              <a:t>Payload</a:t>
+            </a:r>
+            <a:r>
+              <a:rPr kumimoji="1" lang="zh-CN" altLang="en-US" sz="1050" dirty="0">
+                <a:latin typeface="Calisto MT" panose="02040603050505030304" pitchFamily="18" charset="0"/>
+              </a:rPr>
+              <a:t> </a:t>
+            </a:r>
+            <a:r>
+              <a:rPr kumimoji="1" lang="en-US" altLang="zh-CN" sz="1050" dirty="0">
+                <a:latin typeface="Calisto MT" panose="02040603050505030304" pitchFamily="18" charset="0"/>
+              </a:rPr>
+              <a:t>bit </a:t>
+            </a:r>
+            <a:r>
+              <a:rPr kumimoji="1" lang="en-US" altLang="zh-CN" sz="1050" i="1" dirty="0">
+                <a:latin typeface="Calisto MT" panose="02040603050505030304" pitchFamily="18" charset="0"/>
+              </a:rPr>
+              <a:t>j</a:t>
+            </a:r>
+          </a:p>
+          <a:p>
+            <a:pPr algn="ctr"/>
+            <a:r>
+              <a:rPr kumimoji="1" lang="en-US" altLang="zh-CN" sz="1050" dirty="0">
+                <a:latin typeface="Calisto MT" panose="02040603050505030304" pitchFamily="18" charset="0"/>
+              </a:rPr>
+              <a:t>0/1</a:t>
+            </a:r>
+            <a:endParaRPr kumimoji="1" lang="zh-CN" altLang="en-US" sz="1050" dirty="0">
+              <a:latin typeface="Calisto MT" panose="02040603050505030304" pitchFamily="18" charset="0"/>
+            </a:endParaRPr>
+          </a:p>
+        </p:txBody>
+      </p:sp>
+      <p:pic>
+        <p:nvPicPr>
+          <p:cNvPr id="77" name="图形 76">
+            <a:extLst>
+              <a:ext uri="{FF2B5EF4-FFF2-40B4-BE49-F238E27FC236}">
+                <a16:creationId xmlns:a16="http://schemas.microsoft.com/office/drawing/2014/main" id="{4D969777-DB9E-0B6C-3CD5-D9E84DF026AA}"/>
+              </a:ext>
+            </a:extLst>
+          </p:cNvPr>
+          <p:cNvPicPr>
+            <a:picLocks noChangeAspect="1"/>
+          </p:cNvPicPr>
+          <p:nvPr/>
+        </p:nvPicPr>
+        <p:blipFill>
+          <a:blip r:embed="rId5">
+            <a:extLst>
+              <a:ext uri="{96DAC541-7B7A-43D3-8B79-37D633B846F1}">
+                <asvg:svgBlip xmlns:asvg="http://schemas.microsoft.com/office/drawing/2016/SVG/main" r:embed="rId6"/>
+              </a:ext>
+            </a:extLst>
+          </a:blip>
+          <a:stretch>
+            <a:fillRect/>
+          </a:stretch>
+        </p:blipFill>
+        <p:spPr>
+          <a:xfrm>
+            <a:off x="5931793" y="1182878"/>
+            <a:ext cx="215444" cy="215444"/>
+          </a:xfrm>
+          <a:prstGeom prst="rect">
+            <a:avLst/>
+          </a:prstGeom>
+        </p:spPr>
+      </p:pic>
+      <p:cxnSp>
+        <p:nvCxnSpPr>
+          <p:cNvPr id="79" name="直线箭头连接符 78">
+            <a:extLst>
+              <a:ext uri="{FF2B5EF4-FFF2-40B4-BE49-F238E27FC236}">
+                <a16:creationId xmlns:a16="http://schemas.microsoft.com/office/drawing/2014/main" id="{DFD22199-F68E-D4B2-7714-AE6D68BCDD65}"/>
+              </a:ext>
+            </a:extLst>
+          </p:cNvPr>
+          <p:cNvCxnSpPr>
+            <a:cxnSpLocks/>
+          </p:cNvCxnSpPr>
+          <p:nvPr/>
+        </p:nvCxnSpPr>
+        <p:spPr>
+          <a:xfrm>
+            <a:off x="6052041" y="1708552"/>
+            <a:ext cx="0" cy="170349"/>
+          </a:xfrm>
+          <a:prstGeom prst="straightConnector1">
+            <a:avLst/>
+          </a:prstGeom>
+          <a:ln>
+            <a:solidFill>
+              <a:schemeClr val="tx1"/>
+            </a:solidFill>
+            <a:tailEnd type="triangle"/>
+          </a:ln>
+        </p:spPr>
+        <p:style>
+          <a:lnRef idx="2">
+            <a:schemeClr val="accent1"/>
+          </a:lnRef>
+          <a:fillRef idx="0">
+            <a:schemeClr val="accent1"/>
+          </a:fillRef>
+          <a:effectRef idx="1">
+            <a:schemeClr val="accent1"/>
+          </a:effectRef>
+          <a:fontRef idx="minor">
+            <a:schemeClr val="tx1"/>
+          </a:fontRef>
+        </p:style>
+      </p:cxnSp>
+      <p:sp>
+        <p:nvSpPr>
+          <p:cNvPr id="81" name="矩形 80">
+            <a:extLst>
+              <a:ext uri="{FF2B5EF4-FFF2-40B4-BE49-F238E27FC236}">
+                <a16:creationId xmlns:a16="http://schemas.microsoft.com/office/drawing/2014/main" id="{2CE393E7-CFE3-C03B-69F9-74B3DADC33BA}"/>
+              </a:ext>
+            </a:extLst>
+          </p:cNvPr>
+          <p:cNvSpPr>
+            <a:spLocks noChangeAspect="1"/>
+          </p:cNvSpPr>
+          <p:nvPr/>
+        </p:nvSpPr>
+        <p:spPr>
+          <a:xfrm>
+            <a:off x="6769664" y="1248933"/>
+            <a:ext cx="265663" cy="470595"/>
+          </a:xfrm>
+          <a:prstGeom prst="rect">
+            <a:avLst/>
+          </a:prstGeom>
+          <a:solidFill>
+            <a:schemeClr val="bg1">
+              <a:lumMod val="85000"/>
+            </a:schemeClr>
+          </a:solidFill>
+          <a:ln w="12700">
+            <a:noFill/>
+          </a:ln>
+        </p:spPr>
+        <p:style>
+          <a:lnRef idx="2">
+            <a:schemeClr val="accent1">
+              <a:shade val="15000"/>
+            </a:schemeClr>
+          </a:lnRef>
+          <a:fillRef idx="1">
+            <a:schemeClr val="accent1"/>
+          </a:fillRef>
+          <a:effectRef idx="0">
+            <a:schemeClr val="accent1"/>
+          </a:effectRef>
+          <a:fontRef idx="minor">
+            <a:schemeClr val="lt1"/>
+          </a:fontRef>
+        </p:style>
+        <p:txBody>
+          <a:bodyPr rtlCol="0" anchor="ctr"/>
+          <a:lstStyle/>
+          <a:p>
+            <a:pPr algn="ctr"/>
+            <a:endParaRPr kumimoji="1" lang="zh-CN" altLang="en-US"/>
+          </a:p>
+        </p:txBody>
+      </p:sp>
+      <p:sp>
+        <p:nvSpPr>
+          <p:cNvPr id="82" name="矩形 81">
+            <a:extLst>
+              <a:ext uri="{FF2B5EF4-FFF2-40B4-BE49-F238E27FC236}">
+                <a16:creationId xmlns:a16="http://schemas.microsoft.com/office/drawing/2014/main" id="{CA782EF6-97D1-104C-1EFA-FBBA4E143535}"/>
+              </a:ext>
+            </a:extLst>
+          </p:cNvPr>
+          <p:cNvSpPr>
+            <a:spLocks noChangeAspect="1"/>
+          </p:cNvSpPr>
+          <p:nvPr/>
+        </p:nvSpPr>
+        <p:spPr>
+          <a:xfrm>
+            <a:off x="6768984" y="1860436"/>
+            <a:ext cx="265663" cy="470595"/>
+          </a:xfrm>
+          <a:prstGeom prst="rect">
+            <a:avLst/>
+          </a:prstGeom>
+          <a:solidFill>
+            <a:schemeClr val="bg1">
+              <a:lumMod val="85000"/>
+            </a:schemeClr>
+          </a:solidFill>
+          <a:ln w="12700">
+            <a:noFill/>
+          </a:ln>
+        </p:spPr>
+        <p:style>
+          <a:lnRef idx="2">
+            <a:schemeClr val="accent1">
+              <a:shade val="15000"/>
+            </a:schemeClr>
+          </a:lnRef>
+          <a:fillRef idx="1">
+            <a:schemeClr val="accent1"/>
+          </a:fillRef>
+          <a:effectRef idx="0">
+            <a:schemeClr val="accent1"/>
+          </a:effectRef>
+          <a:fontRef idx="minor">
+            <a:schemeClr val="lt1"/>
+          </a:fontRef>
+        </p:style>
+        <p:txBody>
+          <a:bodyPr rtlCol="0" anchor="ctr"/>
+          <a:lstStyle/>
+          <a:p>
+            <a:pPr algn="ctr"/>
+            <a:endParaRPr kumimoji="1" lang="zh-CN" altLang="en-US"/>
+          </a:p>
+        </p:txBody>
+      </p:sp>
+      <p:sp>
+        <p:nvSpPr>
+          <p:cNvPr id="83" name="矩形 82">
+            <a:extLst>
+              <a:ext uri="{FF2B5EF4-FFF2-40B4-BE49-F238E27FC236}">
+                <a16:creationId xmlns:a16="http://schemas.microsoft.com/office/drawing/2014/main" id="{708FA7BB-BE9D-B00B-B12E-9C77EE40647A}"/>
+              </a:ext>
+            </a:extLst>
+          </p:cNvPr>
+          <p:cNvSpPr>
+            <a:spLocks noChangeAspect="1"/>
+          </p:cNvSpPr>
+          <p:nvPr/>
+        </p:nvSpPr>
+        <p:spPr>
+          <a:xfrm>
+            <a:off x="6769376" y="2766137"/>
+            <a:ext cx="265663" cy="470595"/>
+          </a:xfrm>
+          <a:prstGeom prst="rect">
+            <a:avLst/>
+          </a:prstGeom>
+          <a:solidFill>
+            <a:schemeClr val="bg1">
+              <a:lumMod val="85000"/>
+            </a:schemeClr>
+          </a:solidFill>
+          <a:ln w="12700">
+            <a:noFill/>
+          </a:ln>
+        </p:spPr>
+        <p:style>
+          <a:lnRef idx="2">
+            <a:schemeClr val="accent1">
+              <a:shade val="15000"/>
+            </a:schemeClr>
+          </a:lnRef>
+          <a:fillRef idx="1">
+            <a:schemeClr val="accent1"/>
+          </a:fillRef>
+          <a:effectRef idx="0">
+            <a:schemeClr val="accent1"/>
+          </a:effectRef>
+          <a:fontRef idx="minor">
+            <a:schemeClr val="lt1"/>
+          </a:fontRef>
+        </p:style>
+        <p:txBody>
+          <a:bodyPr rtlCol="0" anchor="ctr"/>
+          <a:lstStyle/>
+          <a:p>
+            <a:pPr algn="ctr"/>
+            <a:endParaRPr kumimoji="1" lang="zh-CN" altLang="en-US"/>
+          </a:p>
+        </p:txBody>
+      </p:sp>
+      <p:cxnSp>
+        <p:nvCxnSpPr>
+          <p:cNvPr id="86" name="直线连接符 85">
+            <a:extLst>
+              <a:ext uri="{FF2B5EF4-FFF2-40B4-BE49-F238E27FC236}">
+                <a16:creationId xmlns:a16="http://schemas.microsoft.com/office/drawing/2014/main" id="{60D3A060-1136-D916-0FB8-432EFF8573B0}"/>
+              </a:ext>
+            </a:extLst>
+          </p:cNvPr>
+          <p:cNvCxnSpPr>
+            <a:cxnSpLocks/>
+          </p:cNvCxnSpPr>
+          <p:nvPr/>
+        </p:nvCxnSpPr>
+        <p:spPr>
+          <a:xfrm>
+            <a:off x="6901815" y="2483753"/>
+            <a:ext cx="0" cy="118405"/>
+          </a:xfrm>
+          <a:prstGeom prst="line">
+            <a:avLst/>
+          </a:prstGeom>
+          <a:ln w="22225">
+            <a:solidFill>
+              <a:schemeClr val="tx1"/>
+            </a:solidFill>
+            <a:prstDash val="sysDot"/>
+          </a:ln>
+        </p:spPr>
+        <p:style>
+          <a:lnRef idx="2">
+            <a:schemeClr val="accent1"/>
+          </a:lnRef>
+          <a:fillRef idx="0">
+            <a:schemeClr val="accent1"/>
+          </a:fillRef>
+          <a:effectRef idx="1">
+            <a:schemeClr val="accent1"/>
+          </a:effectRef>
+          <a:fontRef idx="minor">
+            <a:schemeClr val="tx1"/>
+          </a:fontRef>
+        </p:style>
+      </p:cxnSp>
+      <p:cxnSp>
+        <p:nvCxnSpPr>
+          <p:cNvPr id="89" name="直线连接符 88">
+            <a:extLst>
+              <a:ext uri="{FF2B5EF4-FFF2-40B4-BE49-F238E27FC236}">
+                <a16:creationId xmlns:a16="http://schemas.microsoft.com/office/drawing/2014/main" id="{891A31FD-1EBF-B5F4-5663-35B6CEB10281}"/>
+              </a:ext>
+            </a:extLst>
+          </p:cNvPr>
+          <p:cNvCxnSpPr>
+            <a:cxnSpLocks/>
+          </p:cNvCxnSpPr>
+          <p:nvPr/>
+        </p:nvCxnSpPr>
+        <p:spPr>
+          <a:xfrm>
+            <a:off x="5761101" y="1974010"/>
+            <a:ext cx="609475" cy="0"/>
+          </a:xfrm>
+          <a:prstGeom prst="line">
+            <a:avLst/>
+          </a:prstGeom>
+          <a:ln w="9525">
+            <a:solidFill>
+              <a:schemeClr val="bg2">
+                <a:lumMod val="50000"/>
+                <a:alpha val="79536"/>
+              </a:schemeClr>
+            </a:solidFill>
+          </a:ln>
+        </p:spPr>
+        <p:style>
+          <a:lnRef idx="2">
+            <a:schemeClr val="accent1"/>
+          </a:lnRef>
+          <a:fillRef idx="0">
+            <a:schemeClr val="accent1"/>
+          </a:fillRef>
+          <a:effectRef idx="1">
+            <a:schemeClr val="accent1"/>
+          </a:effectRef>
+          <a:fontRef idx="minor">
+            <a:schemeClr val="tx1"/>
+          </a:fontRef>
+        </p:style>
+      </p:cxnSp>
+      <p:cxnSp>
+        <p:nvCxnSpPr>
+          <p:cNvPr id="91" name="直线连接符 90">
+            <a:extLst>
+              <a:ext uri="{FF2B5EF4-FFF2-40B4-BE49-F238E27FC236}">
+                <a16:creationId xmlns:a16="http://schemas.microsoft.com/office/drawing/2014/main" id="{59895E2C-9AFD-F03D-B6BF-D4CE8F09EA41}"/>
+              </a:ext>
+            </a:extLst>
+          </p:cNvPr>
+          <p:cNvCxnSpPr>
+            <a:cxnSpLocks/>
+          </p:cNvCxnSpPr>
+          <p:nvPr/>
+        </p:nvCxnSpPr>
+        <p:spPr>
+          <a:xfrm>
+            <a:off x="5761100" y="2057776"/>
+            <a:ext cx="609475" cy="0"/>
+          </a:xfrm>
+          <a:prstGeom prst="line">
+            <a:avLst/>
+          </a:prstGeom>
+          <a:ln w="9525">
+            <a:solidFill>
+              <a:schemeClr val="bg2">
+                <a:lumMod val="50000"/>
+                <a:alpha val="79536"/>
+              </a:schemeClr>
+            </a:solidFill>
+          </a:ln>
+        </p:spPr>
+        <p:style>
+          <a:lnRef idx="2">
+            <a:schemeClr val="accent1"/>
+          </a:lnRef>
+          <a:fillRef idx="0">
+            <a:schemeClr val="accent1"/>
+          </a:fillRef>
+          <a:effectRef idx="1">
+            <a:schemeClr val="accent1"/>
+          </a:effectRef>
+          <a:fontRef idx="minor">
+            <a:schemeClr val="tx1"/>
+          </a:fontRef>
+        </p:style>
+      </p:cxnSp>
+      <p:cxnSp>
+        <p:nvCxnSpPr>
+          <p:cNvPr id="92" name="直线连接符 91">
+            <a:extLst>
+              <a:ext uri="{FF2B5EF4-FFF2-40B4-BE49-F238E27FC236}">
+                <a16:creationId xmlns:a16="http://schemas.microsoft.com/office/drawing/2014/main" id="{6C6E3980-8FF9-ECBE-6796-49D96B291A32}"/>
+              </a:ext>
+            </a:extLst>
+          </p:cNvPr>
+          <p:cNvCxnSpPr>
+            <a:cxnSpLocks/>
+          </p:cNvCxnSpPr>
+          <p:nvPr/>
+        </p:nvCxnSpPr>
+        <p:spPr>
+          <a:xfrm>
+            <a:off x="5761100" y="2138899"/>
+            <a:ext cx="609475" cy="0"/>
+          </a:xfrm>
+          <a:prstGeom prst="line">
+            <a:avLst/>
+          </a:prstGeom>
+          <a:ln w="9525">
+            <a:solidFill>
+              <a:schemeClr val="bg2">
+                <a:lumMod val="50000"/>
+                <a:alpha val="79536"/>
+              </a:schemeClr>
+            </a:solidFill>
+          </a:ln>
+        </p:spPr>
+        <p:style>
+          <a:lnRef idx="2">
+            <a:schemeClr val="accent1"/>
+          </a:lnRef>
+          <a:fillRef idx="0">
+            <a:schemeClr val="accent1"/>
+          </a:fillRef>
+          <a:effectRef idx="1">
+            <a:schemeClr val="accent1"/>
+          </a:effectRef>
+          <a:fontRef idx="minor">
+            <a:schemeClr val="tx1"/>
+          </a:fontRef>
+        </p:style>
+      </p:cxnSp>
+      <p:cxnSp>
+        <p:nvCxnSpPr>
+          <p:cNvPr id="93" name="直线连接符 92">
+            <a:extLst>
+              <a:ext uri="{FF2B5EF4-FFF2-40B4-BE49-F238E27FC236}">
+                <a16:creationId xmlns:a16="http://schemas.microsoft.com/office/drawing/2014/main" id="{33183129-A0BC-CC03-7D8D-F645C8F7A332}"/>
+              </a:ext>
+            </a:extLst>
+          </p:cNvPr>
+          <p:cNvCxnSpPr>
+            <a:cxnSpLocks/>
+          </p:cNvCxnSpPr>
+          <p:nvPr/>
+        </p:nvCxnSpPr>
+        <p:spPr>
+          <a:xfrm>
+            <a:off x="5761100" y="2229502"/>
+            <a:ext cx="609475" cy="0"/>
+          </a:xfrm>
+          <a:prstGeom prst="line">
+            <a:avLst/>
+          </a:prstGeom>
+          <a:ln w="9525">
+            <a:solidFill>
+              <a:schemeClr val="bg2">
+                <a:lumMod val="50000"/>
+                <a:alpha val="79536"/>
+              </a:schemeClr>
+            </a:solidFill>
+          </a:ln>
+        </p:spPr>
+        <p:style>
+          <a:lnRef idx="2">
+            <a:schemeClr val="accent1"/>
+          </a:lnRef>
+          <a:fillRef idx="0">
+            <a:schemeClr val="accent1"/>
+          </a:fillRef>
+          <a:effectRef idx="1">
+            <a:schemeClr val="accent1"/>
+          </a:effectRef>
+          <a:fontRef idx="minor">
+            <a:schemeClr val="tx1"/>
+          </a:fontRef>
+        </p:style>
+      </p:cxnSp>
+      <p:cxnSp>
+        <p:nvCxnSpPr>
+          <p:cNvPr id="96" name="直线连接符 95">
+            <a:extLst>
+              <a:ext uri="{FF2B5EF4-FFF2-40B4-BE49-F238E27FC236}">
+                <a16:creationId xmlns:a16="http://schemas.microsoft.com/office/drawing/2014/main" id="{B7AEAC99-4DF7-ABB5-D6AE-2823B3AEABB0}"/>
+              </a:ext>
+            </a:extLst>
+          </p:cNvPr>
+          <p:cNvCxnSpPr>
+            <a:cxnSpLocks/>
+          </p:cNvCxnSpPr>
+          <p:nvPr/>
+        </p:nvCxnSpPr>
+        <p:spPr>
+          <a:xfrm>
+            <a:off x="5761100" y="2602158"/>
+            <a:ext cx="609475" cy="0"/>
+          </a:xfrm>
+          <a:prstGeom prst="line">
+            <a:avLst/>
+          </a:prstGeom>
+          <a:ln w="9525">
+            <a:solidFill>
+              <a:schemeClr val="bg2">
+                <a:lumMod val="50000"/>
+                <a:alpha val="79536"/>
+              </a:schemeClr>
+            </a:solidFill>
+          </a:ln>
+        </p:spPr>
+        <p:style>
+          <a:lnRef idx="2">
+            <a:schemeClr val="accent1"/>
+          </a:lnRef>
+          <a:fillRef idx="0">
+            <a:schemeClr val="accent1"/>
+          </a:fillRef>
+          <a:effectRef idx="1">
+            <a:schemeClr val="accent1"/>
+          </a:effectRef>
+          <a:fontRef idx="minor">
+            <a:schemeClr val="tx1"/>
+          </a:fontRef>
+        </p:style>
+      </p:cxnSp>
+      <p:cxnSp>
+        <p:nvCxnSpPr>
+          <p:cNvPr id="97" name="直线连接符 96">
+            <a:extLst>
+              <a:ext uri="{FF2B5EF4-FFF2-40B4-BE49-F238E27FC236}">
+                <a16:creationId xmlns:a16="http://schemas.microsoft.com/office/drawing/2014/main" id="{372C225C-5C2B-C098-B04C-A7882DFEBD34}"/>
+              </a:ext>
+            </a:extLst>
+          </p:cNvPr>
+          <p:cNvCxnSpPr>
+            <a:cxnSpLocks/>
+          </p:cNvCxnSpPr>
+          <p:nvPr/>
+        </p:nvCxnSpPr>
+        <p:spPr>
+          <a:xfrm>
+            <a:off x="5761099" y="2685924"/>
+            <a:ext cx="609475" cy="0"/>
+          </a:xfrm>
+          <a:prstGeom prst="line">
+            <a:avLst/>
+          </a:prstGeom>
+          <a:ln w="9525">
+            <a:solidFill>
+              <a:schemeClr val="bg2">
+                <a:lumMod val="50000"/>
+                <a:alpha val="79536"/>
+              </a:schemeClr>
+            </a:solidFill>
+          </a:ln>
+        </p:spPr>
+        <p:style>
+          <a:lnRef idx="2">
+            <a:schemeClr val="accent1"/>
+          </a:lnRef>
+          <a:fillRef idx="0">
+            <a:schemeClr val="accent1"/>
+          </a:fillRef>
+          <a:effectRef idx="1">
+            <a:schemeClr val="accent1"/>
+          </a:effectRef>
+          <a:fontRef idx="minor">
+            <a:schemeClr val="tx1"/>
+          </a:fontRef>
+        </p:style>
+      </p:cxnSp>
+      <p:cxnSp>
+        <p:nvCxnSpPr>
+          <p:cNvPr id="98" name="直线连接符 97">
+            <a:extLst>
+              <a:ext uri="{FF2B5EF4-FFF2-40B4-BE49-F238E27FC236}">
+                <a16:creationId xmlns:a16="http://schemas.microsoft.com/office/drawing/2014/main" id="{52647D82-C09F-1AEF-FC4F-2348ADAAD4CA}"/>
+              </a:ext>
+            </a:extLst>
+          </p:cNvPr>
+          <p:cNvCxnSpPr>
+            <a:cxnSpLocks/>
+          </p:cNvCxnSpPr>
+          <p:nvPr/>
+        </p:nvCxnSpPr>
+        <p:spPr>
+          <a:xfrm>
+            <a:off x="5761099" y="2767047"/>
+            <a:ext cx="609475" cy="0"/>
+          </a:xfrm>
+          <a:prstGeom prst="line">
+            <a:avLst/>
+          </a:prstGeom>
+          <a:ln w="9525">
+            <a:solidFill>
+              <a:schemeClr val="bg2">
+                <a:lumMod val="50000"/>
+                <a:alpha val="79536"/>
+              </a:schemeClr>
+            </a:solidFill>
+          </a:ln>
+        </p:spPr>
+        <p:style>
+          <a:lnRef idx="2">
+            <a:schemeClr val="accent1"/>
+          </a:lnRef>
+          <a:fillRef idx="0">
+            <a:schemeClr val="accent1"/>
+          </a:fillRef>
+          <a:effectRef idx="1">
+            <a:schemeClr val="accent1"/>
+          </a:effectRef>
+          <a:fontRef idx="minor">
+            <a:schemeClr val="tx1"/>
+          </a:fontRef>
+        </p:style>
+      </p:cxnSp>
+      <p:cxnSp>
+        <p:nvCxnSpPr>
+          <p:cNvPr id="99" name="直线连接符 98">
+            <a:extLst>
+              <a:ext uri="{FF2B5EF4-FFF2-40B4-BE49-F238E27FC236}">
+                <a16:creationId xmlns:a16="http://schemas.microsoft.com/office/drawing/2014/main" id="{7D3E0276-CD80-46E7-A2C4-7619CC2703D8}"/>
+              </a:ext>
+            </a:extLst>
+          </p:cNvPr>
+          <p:cNvCxnSpPr>
+            <a:cxnSpLocks/>
+          </p:cNvCxnSpPr>
+          <p:nvPr/>
+        </p:nvCxnSpPr>
+        <p:spPr>
+          <a:xfrm>
+            <a:off x="5761099" y="2857650"/>
+            <a:ext cx="609475" cy="0"/>
+          </a:xfrm>
+          <a:prstGeom prst="line">
+            <a:avLst/>
+          </a:prstGeom>
+          <a:ln w="9525">
+            <a:solidFill>
+              <a:schemeClr val="bg2">
+                <a:lumMod val="50000"/>
+                <a:alpha val="79536"/>
+              </a:schemeClr>
+            </a:solidFill>
+          </a:ln>
+        </p:spPr>
+        <p:style>
+          <a:lnRef idx="2">
+            <a:schemeClr val="accent1"/>
+          </a:lnRef>
+          <a:fillRef idx="0">
+            <a:schemeClr val="accent1"/>
+          </a:fillRef>
+          <a:effectRef idx="1">
+            <a:schemeClr val="accent1"/>
+          </a:effectRef>
+          <a:fontRef idx="minor">
+            <a:schemeClr val="tx1"/>
+          </a:fontRef>
+        </p:style>
+      </p:cxnSp>
+      <p:cxnSp>
+        <p:nvCxnSpPr>
+          <p:cNvPr id="100" name="直线连接符 99">
+            <a:extLst>
+              <a:ext uri="{FF2B5EF4-FFF2-40B4-BE49-F238E27FC236}">
+                <a16:creationId xmlns:a16="http://schemas.microsoft.com/office/drawing/2014/main" id="{AAFE3A88-3699-6FBB-57F3-D45845B53268}"/>
+              </a:ext>
+            </a:extLst>
+          </p:cNvPr>
+          <p:cNvCxnSpPr>
+            <a:cxnSpLocks/>
+          </p:cNvCxnSpPr>
+          <p:nvPr/>
+        </p:nvCxnSpPr>
+        <p:spPr>
+          <a:xfrm>
+            <a:off x="6052041" y="2365348"/>
+            <a:ext cx="0" cy="118405"/>
+          </a:xfrm>
+          <a:prstGeom prst="line">
+            <a:avLst/>
+          </a:prstGeom>
+          <a:ln w="22225">
+            <a:solidFill>
+              <a:schemeClr val="bg2">
+                <a:lumMod val="50000"/>
+                <a:alpha val="79536"/>
+              </a:schemeClr>
+            </a:solidFill>
+            <a:prstDash val="sysDot"/>
+          </a:ln>
+        </p:spPr>
+        <p:style>
+          <a:lnRef idx="2">
+            <a:schemeClr val="accent1"/>
+          </a:lnRef>
+          <a:fillRef idx="0">
+            <a:schemeClr val="accent1"/>
+          </a:fillRef>
+          <a:effectRef idx="1">
+            <a:schemeClr val="accent1"/>
+          </a:effectRef>
+          <a:fontRef idx="minor">
+            <a:schemeClr val="tx1"/>
+          </a:fontRef>
+        </p:style>
+      </p:cxnSp>
+      <p:sp>
+        <p:nvSpPr>
+          <p:cNvPr id="101" name="矩形 100">
+            <a:extLst>
+              <a:ext uri="{FF2B5EF4-FFF2-40B4-BE49-F238E27FC236}">
+                <a16:creationId xmlns:a16="http://schemas.microsoft.com/office/drawing/2014/main" id="{DA087BF9-FE1C-BFF2-5633-EDEBEE47A2C8}"/>
+              </a:ext>
+            </a:extLst>
+          </p:cNvPr>
+          <p:cNvSpPr/>
+          <p:nvPr/>
+        </p:nvSpPr>
+        <p:spPr>
+          <a:xfrm flipV="1">
+            <a:off x="6768984" y="1383657"/>
+            <a:ext cx="264087" cy="21600"/>
+          </a:xfrm>
+          <a:prstGeom prst="rect">
+            <a:avLst/>
+          </a:prstGeom>
+          <a:solidFill>
+            <a:srgbClr val="618ADC"/>
+          </a:solidFill>
+          <a:ln>
+            <a:noFill/>
+          </a:ln>
+        </p:spPr>
+        <p:style>
+          <a:lnRef idx="2">
+            <a:schemeClr val="accent1">
+              <a:shade val="15000"/>
+            </a:schemeClr>
+          </a:lnRef>
+          <a:fillRef idx="1">
+            <a:schemeClr val="accent1"/>
+          </a:fillRef>
+          <a:effectRef idx="0">
+            <a:schemeClr val="accent1"/>
+          </a:effectRef>
+          <a:fontRef idx="minor">
+            <a:schemeClr val="lt1"/>
+          </a:fontRef>
+        </p:style>
+        <p:txBody>
+          <a:bodyPr rtlCol="0" anchor="ctr"/>
+          <a:lstStyle/>
+          <a:p>
+            <a:pPr algn="ctr"/>
+            <a:endParaRPr kumimoji="1" lang="zh-CN" altLang="en-US"/>
+          </a:p>
+        </p:txBody>
+      </p:sp>
+      <p:sp>
+        <p:nvSpPr>
+          <p:cNvPr id="102" name="矩形 101">
+            <a:extLst>
+              <a:ext uri="{FF2B5EF4-FFF2-40B4-BE49-F238E27FC236}">
+                <a16:creationId xmlns:a16="http://schemas.microsoft.com/office/drawing/2014/main" id="{78F2E8E2-30DA-BE79-1EA4-DD047E46F041}"/>
+              </a:ext>
+            </a:extLst>
+          </p:cNvPr>
+          <p:cNvSpPr/>
+          <p:nvPr/>
+        </p:nvSpPr>
+        <p:spPr>
+          <a:xfrm flipV="1">
+            <a:off x="6768984" y="1564368"/>
+            <a:ext cx="264087" cy="21600"/>
+          </a:xfrm>
+          <a:prstGeom prst="rect">
+            <a:avLst/>
+          </a:prstGeom>
+          <a:solidFill>
+            <a:srgbClr val="618ADC"/>
+          </a:solidFill>
+          <a:ln>
+            <a:noFill/>
+          </a:ln>
+        </p:spPr>
+        <p:style>
+          <a:lnRef idx="2">
+            <a:schemeClr val="accent1">
+              <a:shade val="15000"/>
+            </a:schemeClr>
+          </a:lnRef>
+          <a:fillRef idx="1">
+            <a:schemeClr val="accent1"/>
+          </a:fillRef>
+          <a:effectRef idx="0">
+            <a:schemeClr val="accent1"/>
+          </a:effectRef>
+          <a:fontRef idx="minor">
+            <a:schemeClr val="lt1"/>
+          </a:fontRef>
+        </p:style>
+        <p:txBody>
+          <a:bodyPr rtlCol="0" anchor="ctr"/>
+          <a:lstStyle/>
+          <a:p>
+            <a:pPr algn="ctr"/>
+            <a:endParaRPr kumimoji="1" lang="zh-CN" altLang="en-US"/>
+          </a:p>
+        </p:txBody>
+      </p:sp>
+      <p:sp>
+        <p:nvSpPr>
+          <p:cNvPr id="103" name="矩形 102">
+            <a:extLst>
+              <a:ext uri="{FF2B5EF4-FFF2-40B4-BE49-F238E27FC236}">
+                <a16:creationId xmlns:a16="http://schemas.microsoft.com/office/drawing/2014/main" id="{69B0C8F9-BA1B-905E-7D21-AA714CCD2FF8}"/>
+              </a:ext>
+            </a:extLst>
+          </p:cNvPr>
+          <p:cNvSpPr/>
+          <p:nvPr/>
+        </p:nvSpPr>
+        <p:spPr>
+          <a:xfrm flipV="1">
+            <a:off x="6768984" y="1603643"/>
+            <a:ext cx="264087" cy="21600"/>
+          </a:xfrm>
+          <a:prstGeom prst="rect">
+            <a:avLst/>
+          </a:prstGeom>
+          <a:solidFill>
+            <a:srgbClr val="618ADC"/>
+          </a:solidFill>
+          <a:ln>
+            <a:noFill/>
+          </a:ln>
+        </p:spPr>
+        <p:style>
+          <a:lnRef idx="2">
+            <a:schemeClr val="accent1">
+              <a:shade val="15000"/>
+            </a:schemeClr>
+          </a:lnRef>
+          <a:fillRef idx="1">
+            <a:schemeClr val="accent1"/>
+          </a:fillRef>
+          <a:effectRef idx="0">
+            <a:schemeClr val="accent1"/>
+          </a:effectRef>
+          <a:fontRef idx="minor">
+            <a:schemeClr val="lt1"/>
+          </a:fontRef>
+        </p:style>
+        <p:txBody>
+          <a:bodyPr rtlCol="0" anchor="ctr"/>
+          <a:lstStyle/>
+          <a:p>
+            <a:pPr algn="ctr"/>
+            <a:endParaRPr kumimoji="1" lang="zh-CN" altLang="en-US"/>
+          </a:p>
+        </p:txBody>
+      </p:sp>
+      <p:sp>
+        <p:nvSpPr>
+          <p:cNvPr id="104" name="矩形 103">
+            <a:extLst>
+              <a:ext uri="{FF2B5EF4-FFF2-40B4-BE49-F238E27FC236}">
+                <a16:creationId xmlns:a16="http://schemas.microsoft.com/office/drawing/2014/main" id="{072BE04C-E4CE-30B3-B4CF-AC933DE300FC}"/>
+              </a:ext>
+            </a:extLst>
+          </p:cNvPr>
+          <p:cNvSpPr/>
+          <p:nvPr/>
+        </p:nvSpPr>
+        <p:spPr>
+          <a:xfrm flipV="1">
+            <a:off x="6768983" y="1462735"/>
+            <a:ext cx="264087" cy="21600"/>
+          </a:xfrm>
+          <a:prstGeom prst="rect">
+            <a:avLst/>
+          </a:prstGeom>
+          <a:solidFill>
+            <a:srgbClr val="FF0000">
+              <a:alpha val="49904"/>
+            </a:srgbClr>
+          </a:solidFill>
+          <a:ln>
+            <a:noFill/>
+          </a:ln>
+        </p:spPr>
+        <p:style>
+          <a:lnRef idx="2">
+            <a:schemeClr val="accent1">
+              <a:shade val="15000"/>
+            </a:schemeClr>
+          </a:lnRef>
+          <a:fillRef idx="1">
+            <a:schemeClr val="accent1"/>
+          </a:fillRef>
+          <a:effectRef idx="0">
+            <a:schemeClr val="accent1"/>
+          </a:effectRef>
+          <a:fontRef idx="minor">
+            <a:schemeClr val="lt1"/>
+          </a:fontRef>
+        </p:style>
+        <p:txBody>
+          <a:bodyPr rtlCol="0" anchor="ctr"/>
+          <a:lstStyle/>
+          <a:p>
+            <a:pPr algn="ctr"/>
+            <a:endParaRPr kumimoji="1" lang="zh-CN" altLang="en-US"/>
+          </a:p>
+        </p:txBody>
+      </p:sp>
+      <p:sp>
+        <p:nvSpPr>
+          <p:cNvPr id="105" name="矩形 104">
+            <a:extLst>
+              <a:ext uri="{FF2B5EF4-FFF2-40B4-BE49-F238E27FC236}">
+                <a16:creationId xmlns:a16="http://schemas.microsoft.com/office/drawing/2014/main" id="{75C22AE2-33C7-9635-3669-07D76AE0A64E}"/>
+              </a:ext>
+            </a:extLst>
+          </p:cNvPr>
+          <p:cNvSpPr/>
+          <p:nvPr/>
+        </p:nvSpPr>
+        <p:spPr>
+          <a:xfrm flipV="1">
+            <a:off x="6768983" y="1254022"/>
+            <a:ext cx="264087" cy="21600"/>
+          </a:xfrm>
+          <a:prstGeom prst="rect">
+            <a:avLst/>
+          </a:prstGeom>
+          <a:solidFill>
+            <a:srgbClr val="FF0000">
+              <a:alpha val="49904"/>
+            </a:srgbClr>
+          </a:solidFill>
+          <a:ln>
+            <a:noFill/>
+          </a:ln>
+        </p:spPr>
+        <p:style>
+          <a:lnRef idx="2">
+            <a:schemeClr val="accent1">
+              <a:shade val="15000"/>
+            </a:schemeClr>
+          </a:lnRef>
+          <a:fillRef idx="1">
+            <a:schemeClr val="accent1"/>
+          </a:fillRef>
+          <a:effectRef idx="0">
+            <a:schemeClr val="accent1"/>
+          </a:effectRef>
+          <a:fontRef idx="minor">
+            <a:schemeClr val="lt1"/>
+          </a:fontRef>
+        </p:style>
+        <p:txBody>
+          <a:bodyPr rtlCol="0" anchor="ctr"/>
+          <a:lstStyle/>
+          <a:p>
+            <a:pPr algn="ctr"/>
+            <a:endParaRPr kumimoji="1" lang="zh-CN" altLang="en-US"/>
+          </a:p>
+        </p:txBody>
+      </p:sp>
+      <p:sp>
+        <p:nvSpPr>
+          <p:cNvPr id="106" name="矩形 105">
+            <a:extLst>
+              <a:ext uri="{FF2B5EF4-FFF2-40B4-BE49-F238E27FC236}">
+                <a16:creationId xmlns:a16="http://schemas.microsoft.com/office/drawing/2014/main" id="{AFB1A7A1-EC34-33E8-5E40-2CC2EE4B436B}"/>
+              </a:ext>
+            </a:extLst>
+          </p:cNvPr>
+          <p:cNvSpPr/>
+          <p:nvPr/>
+        </p:nvSpPr>
+        <p:spPr>
+          <a:xfrm flipV="1">
+            <a:off x="6768983" y="1661672"/>
+            <a:ext cx="264087" cy="21600"/>
+          </a:xfrm>
+          <a:prstGeom prst="rect">
+            <a:avLst/>
+          </a:prstGeom>
+          <a:solidFill>
+            <a:srgbClr val="FF0000">
+              <a:alpha val="49904"/>
+            </a:srgbClr>
+          </a:solidFill>
+          <a:ln>
+            <a:noFill/>
+          </a:ln>
+        </p:spPr>
+        <p:style>
+          <a:lnRef idx="2">
+            <a:schemeClr val="accent1">
+              <a:shade val="15000"/>
+            </a:schemeClr>
+          </a:lnRef>
+          <a:fillRef idx="1">
+            <a:schemeClr val="accent1"/>
+          </a:fillRef>
+          <a:effectRef idx="0">
+            <a:schemeClr val="accent1"/>
+          </a:effectRef>
+          <a:fontRef idx="minor">
+            <a:schemeClr val="lt1"/>
+          </a:fontRef>
+        </p:style>
+        <p:txBody>
+          <a:bodyPr rtlCol="0" anchor="ctr"/>
+          <a:lstStyle/>
+          <a:p>
+            <a:pPr algn="ctr"/>
+            <a:endParaRPr kumimoji="1" lang="zh-CN" altLang="en-US"/>
+          </a:p>
+        </p:txBody>
+      </p:sp>
+      <p:sp>
+        <p:nvSpPr>
+          <p:cNvPr id="107" name="矩形 106">
+            <a:extLst>
+              <a:ext uri="{FF2B5EF4-FFF2-40B4-BE49-F238E27FC236}">
+                <a16:creationId xmlns:a16="http://schemas.microsoft.com/office/drawing/2014/main" id="{15AA2D23-7353-B7B6-BD92-2D804BE6D26E}"/>
+              </a:ext>
+            </a:extLst>
+          </p:cNvPr>
+          <p:cNvSpPr/>
+          <p:nvPr/>
+        </p:nvSpPr>
+        <p:spPr>
+          <a:xfrm flipV="1">
+            <a:off x="6768982" y="1938849"/>
+            <a:ext cx="264087" cy="21600"/>
+          </a:xfrm>
+          <a:prstGeom prst="rect">
+            <a:avLst/>
+          </a:prstGeom>
+          <a:solidFill>
+            <a:srgbClr val="FF0000">
+              <a:alpha val="49904"/>
+            </a:srgbClr>
+          </a:solidFill>
+          <a:ln>
+            <a:noFill/>
+          </a:ln>
+        </p:spPr>
+        <p:style>
+          <a:lnRef idx="2">
+            <a:schemeClr val="accent1">
+              <a:shade val="15000"/>
+            </a:schemeClr>
+          </a:lnRef>
+          <a:fillRef idx="1">
+            <a:schemeClr val="accent1"/>
+          </a:fillRef>
+          <a:effectRef idx="0">
+            <a:schemeClr val="accent1"/>
+          </a:effectRef>
+          <a:fontRef idx="minor">
+            <a:schemeClr val="lt1"/>
+          </a:fontRef>
+        </p:style>
+        <p:txBody>
+          <a:bodyPr rtlCol="0" anchor="ctr"/>
+          <a:lstStyle/>
+          <a:p>
+            <a:pPr algn="ctr"/>
+            <a:endParaRPr kumimoji="1" lang="zh-CN" altLang="en-US" dirty="0"/>
+          </a:p>
+        </p:txBody>
+      </p:sp>
+      <p:sp>
+        <p:nvSpPr>
+          <p:cNvPr id="108" name="矩形 107">
+            <a:extLst>
+              <a:ext uri="{FF2B5EF4-FFF2-40B4-BE49-F238E27FC236}">
+                <a16:creationId xmlns:a16="http://schemas.microsoft.com/office/drawing/2014/main" id="{325D5DF3-2273-1CBF-2202-4E94D4E46B20}"/>
+              </a:ext>
+            </a:extLst>
+          </p:cNvPr>
+          <p:cNvSpPr/>
+          <p:nvPr/>
+        </p:nvSpPr>
+        <p:spPr>
+          <a:xfrm flipV="1">
+            <a:off x="6768981" y="2034045"/>
+            <a:ext cx="264087" cy="21600"/>
+          </a:xfrm>
+          <a:prstGeom prst="rect">
+            <a:avLst/>
+          </a:prstGeom>
+          <a:solidFill>
+            <a:srgbClr val="FF0000">
+              <a:alpha val="49904"/>
+            </a:srgbClr>
+          </a:solidFill>
+          <a:ln>
+            <a:noFill/>
+          </a:ln>
+        </p:spPr>
+        <p:style>
+          <a:lnRef idx="2">
+            <a:schemeClr val="accent1">
+              <a:shade val="15000"/>
+            </a:schemeClr>
+          </a:lnRef>
+          <a:fillRef idx="1">
+            <a:schemeClr val="accent1"/>
+          </a:fillRef>
+          <a:effectRef idx="0">
+            <a:schemeClr val="accent1"/>
+          </a:effectRef>
+          <a:fontRef idx="minor">
+            <a:schemeClr val="lt1"/>
+          </a:fontRef>
+        </p:style>
+        <p:txBody>
+          <a:bodyPr rtlCol="0" anchor="ctr"/>
+          <a:lstStyle/>
+          <a:p>
+            <a:pPr algn="ctr"/>
+            <a:endParaRPr kumimoji="1" lang="zh-CN" altLang="en-US"/>
+          </a:p>
+        </p:txBody>
+      </p:sp>
+      <p:sp>
+        <p:nvSpPr>
+          <p:cNvPr id="109" name="矩形 108">
+            <a:extLst>
+              <a:ext uri="{FF2B5EF4-FFF2-40B4-BE49-F238E27FC236}">
+                <a16:creationId xmlns:a16="http://schemas.microsoft.com/office/drawing/2014/main" id="{40F51AC3-C1A7-1C18-96BB-812BBAB54B96}"/>
+              </a:ext>
+            </a:extLst>
+          </p:cNvPr>
+          <p:cNvSpPr/>
+          <p:nvPr/>
+        </p:nvSpPr>
+        <p:spPr>
+          <a:xfrm flipV="1">
+            <a:off x="6768980" y="2304895"/>
+            <a:ext cx="264087" cy="21600"/>
+          </a:xfrm>
+          <a:prstGeom prst="rect">
+            <a:avLst/>
+          </a:prstGeom>
+          <a:solidFill>
+            <a:srgbClr val="FF0000">
+              <a:alpha val="49904"/>
+            </a:srgbClr>
+          </a:solidFill>
+          <a:ln>
+            <a:noFill/>
+          </a:ln>
+        </p:spPr>
+        <p:style>
+          <a:lnRef idx="2">
+            <a:schemeClr val="accent1">
+              <a:shade val="15000"/>
+            </a:schemeClr>
+          </a:lnRef>
+          <a:fillRef idx="1">
+            <a:schemeClr val="accent1"/>
+          </a:fillRef>
+          <a:effectRef idx="0">
+            <a:schemeClr val="accent1"/>
+          </a:effectRef>
+          <a:fontRef idx="minor">
+            <a:schemeClr val="lt1"/>
+          </a:fontRef>
+        </p:style>
+        <p:txBody>
+          <a:bodyPr rtlCol="0" anchor="ctr"/>
+          <a:lstStyle/>
+          <a:p>
+            <a:pPr algn="ctr"/>
+            <a:endParaRPr kumimoji="1" lang="zh-CN" altLang="en-US"/>
+          </a:p>
+        </p:txBody>
+      </p:sp>
+      <p:sp>
+        <p:nvSpPr>
+          <p:cNvPr id="110" name="矩形 109">
+            <a:extLst>
+              <a:ext uri="{FF2B5EF4-FFF2-40B4-BE49-F238E27FC236}">
+                <a16:creationId xmlns:a16="http://schemas.microsoft.com/office/drawing/2014/main" id="{20A3B537-E9D1-2A15-4971-9866FFBC23B1}"/>
+              </a:ext>
+            </a:extLst>
+          </p:cNvPr>
+          <p:cNvSpPr/>
+          <p:nvPr/>
+        </p:nvSpPr>
+        <p:spPr>
+          <a:xfrm flipV="1">
+            <a:off x="6769109" y="2113123"/>
+            <a:ext cx="264087" cy="21600"/>
+          </a:xfrm>
+          <a:prstGeom prst="rect">
+            <a:avLst/>
+          </a:prstGeom>
+          <a:solidFill>
+            <a:srgbClr val="618ADC"/>
+          </a:solidFill>
+          <a:ln>
+            <a:noFill/>
+          </a:ln>
+        </p:spPr>
+        <p:style>
+          <a:lnRef idx="2">
+            <a:schemeClr val="accent1">
+              <a:shade val="15000"/>
+            </a:schemeClr>
+          </a:lnRef>
+          <a:fillRef idx="1">
+            <a:schemeClr val="accent1"/>
+          </a:fillRef>
+          <a:effectRef idx="0">
+            <a:schemeClr val="accent1"/>
+          </a:effectRef>
+          <a:fontRef idx="minor">
+            <a:schemeClr val="lt1"/>
+          </a:fontRef>
+        </p:style>
+        <p:txBody>
+          <a:bodyPr rtlCol="0" anchor="ctr"/>
+          <a:lstStyle/>
+          <a:p>
+            <a:pPr algn="ctr"/>
+            <a:endParaRPr kumimoji="1" lang="zh-CN" altLang="en-US"/>
+          </a:p>
+        </p:txBody>
+      </p:sp>
+      <p:sp>
+        <p:nvSpPr>
+          <p:cNvPr id="111" name="矩形 110">
+            <a:extLst>
+              <a:ext uri="{FF2B5EF4-FFF2-40B4-BE49-F238E27FC236}">
+                <a16:creationId xmlns:a16="http://schemas.microsoft.com/office/drawing/2014/main" id="{261A38F4-F0DE-F64A-9F87-91FA692B7C25}"/>
+              </a:ext>
+            </a:extLst>
+          </p:cNvPr>
+          <p:cNvSpPr/>
+          <p:nvPr/>
+        </p:nvSpPr>
+        <p:spPr>
+          <a:xfrm flipV="1">
+            <a:off x="6769109" y="2189484"/>
+            <a:ext cx="264087" cy="21600"/>
+          </a:xfrm>
+          <a:prstGeom prst="rect">
+            <a:avLst/>
+          </a:prstGeom>
+          <a:solidFill>
+            <a:srgbClr val="618ADC"/>
+          </a:solidFill>
+          <a:ln>
+            <a:noFill/>
+          </a:ln>
+        </p:spPr>
+        <p:style>
+          <a:lnRef idx="2">
+            <a:schemeClr val="accent1">
+              <a:shade val="15000"/>
+            </a:schemeClr>
+          </a:lnRef>
+          <a:fillRef idx="1">
+            <a:schemeClr val="accent1"/>
+          </a:fillRef>
+          <a:effectRef idx="0">
+            <a:schemeClr val="accent1"/>
+          </a:effectRef>
+          <a:fontRef idx="minor">
+            <a:schemeClr val="lt1"/>
+          </a:fontRef>
+        </p:style>
+        <p:txBody>
+          <a:bodyPr rtlCol="0" anchor="ctr"/>
+          <a:lstStyle/>
+          <a:p>
+            <a:pPr algn="ctr"/>
+            <a:endParaRPr kumimoji="1" lang="zh-CN" altLang="en-US"/>
+          </a:p>
+        </p:txBody>
+      </p:sp>
+      <p:sp>
+        <p:nvSpPr>
+          <p:cNvPr id="112" name="矩形 111">
+            <a:extLst>
+              <a:ext uri="{FF2B5EF4-FFF2-40B4-BE49-F238E27FC236}">
+                <a16:creationId xmlns:a16="http://schemas.microsoft.com/office/drawing/2014/main" id="{2DC4FFF1-4B40-91F3-844E-17AF8A301B22}"/>
+              </a:ext>
+            </a:extLst>
+          </p:cNvPr>
+          <p:cNvSpPr/>
+          <p:nvPr/>
+        </p:nvSpPr>
+        <p:spPr>
+          <a:xfrm flipV="1">
+            <a:off x="6769109" y="2247638"/>
+            <a:ext cx="264087" cy="21600"/>
+          </a:xfrm>
+          <a:prstGeom prst="rect">
+            <a:avLst/>
+          </a:prstGeom>
+          <a:solidFill>
+            <a:srgbClr val="618ADC"/>
+          </a:solidFill>
+          <a:ln>
+            <a:noFill/>
+          </a:ln>
+        </p:spPr>
+        <p:style>
+          <a:lnRef idx="2">
+            <a:schemeClr val="accent1">
+              <a:shade val="15000"/>
+            </a:schemeClr>
+          </a:lnRef>
+          <a:fillRef idx="1">
+            <a:schemeClr val="accent1"/>
+          </a:fillRef>
+          <a:effectRef idx="0">
+            <a:schemeClr val="accent1"/>
+          </a:effectRef>
+          <a:fontRef idx="minor">
+            <a:schemeClr val="lt1"/>
+          </a:fontRef>
+        </p:style>
+        <p:txBody>
+          <a:bodyPr rtlCol="0" anchor="ctr"/>
+          <a:lstStyle/>
+          <a:p>
+            <a:pPr algn="ctr"/>
+            <a:endParaRPr kumimoji="1" lang="zh-CN" altLang="en-US"/>
+          </a:p>
+        </p:txBody>
+      </p:sp>
+      <p:sp>
+        <p:nvSpPr>
+          <p:cNvPr id="113" name="矩形 112">
+            <a:extLst>
+              <a:ext uri="{FF2B5EF4-FFF2-40B4-BE49-F238E27FC236}">
+                <a16:creationId xmlns:a16="http://schemas.microsoft.com/office/drawing/2014/main" id="{67C1DFB6-2B26-D653-7D30-29E30ECA44DB}"/>
+              </a:ext>
+            </a:extLst>
+          </p:cNvPr>
+          <p:cNvSpPr/>
+          <p:nvPr/>
+        </p:nvSpPr>
+        <p:spPr>
+          <a:xfrm flipV="1">
+            <a:off x="6771861" y="2803575"/>
+            <a:ext cx="264087" cy="21600"/>
+          </a:xfrm>
+          <a:prstGeom prst="rect">
+            <a:avLst/>
+          </a:prstGeom>
+          <a:solidFill>
+            <a:srgbClr val="618ADC"/>
+          </a:solidFill>
+          <a:ln>
+            <a:noFill/>
+          </a:ln>
+        </p:spPr>
+        <p:style>
+          <a:lnRef idx="2">
+            <a:schemeClr val="accent1">
+              <a:shade val="15000"/>
+            </a:schemeClr>
+          </a:lnRef>
+          <a:fillRef idx="1">
+            <a:schemeClr val="accent1"/>
+          </a:fillRef>
+          <a:effectRef idx="0">
+            <a:schemeClr val="accent1"/>
+          </a:effectRef>
+          <a:fontRef idx="minor">
+            <a:schemeClr val="lt1"/>
+          </a:fontRef>
+        </p:style>
+        <p:txBody>
+          <a:bodyPr rtlCol="0" anchor="ctr"/>
+          <a:lstStyle/>
+          <a:p>
+            <a:pPr algn="ctr"/>
+            <a:endParaRPr kumimoji="1" lang="zh-CN" altLang="en-US"/>
+          </a:p>
+        </p:txBody>
+      </p:sp>
+      <p:sp>
+        <p:nvSpPr>
+          <p:cNvPr id="114" name="矩形 113">
+            <a:extLst>
+              <a:ext uri="{FF2B5EF4-FFF2-40B4-BE49-F238E27FC236}">
+                <a16:creationId xmlns:a16="http://schemas.microsoft.com/office/drawing/2014/main" id="{A4365714-19AD-E06A-46F0-D5DC12415289}"/>
+              </a:ext>
+            </a:extLst>
+          </p:cNvPr>
+          <p:cNvSpPr/>
+          <p:nvPr/>
+        </p:nvSpPr>
+        <p:spPr>
+          <a:xfrm flipV="1">
+            <a:off x="6771861" y="2889778"/>
+            <a:ext cx="264087" cy="21600"/>
+          </a:xfrm>
+          <a:prstGeom prst="rect">
+            <a:avLst/>
+          </a:prstGeom>
+          <a:solidFill>
+            <a:srgbClr val="618ADC"/>
+          </a:solidFill>
+          <a:ln>
+            <a:noFill/>
+          </a:ln>
+        </p:spPr>
+        <p:style>
+          <a:lnRef idx="2">
+            <a:schemeClr val="accent1">
+              <a:shade val="15000"/>
+            </a:schemeClr>
+          </a:lnRef>
+          <a:fillRef idx="1">
+            <a:schemeClr val="accent1"/>
+          </a:fillRef>
+          <a:effectRef idx="0">
+            <a:schemeClr val="accent1"/>
+          </a:effectRef>
+          <a:fontRef idx="minor">
+            <a:schemeClr val="lt1"/>
+          </a:fontRef>
+        </p:style>
+        <p:txBody>
+          <a:bodyPr rtlCol="0" anchor="ctr"/>
+          <a:lstStyle/>
+          <a:p>
+            <a:pPr algn="ctr"/>
+            <a:endParaRPr kumimoji="1" lang="zh-CN" altLang="en-US"/>
+          </a:p>
+        </p:txBody>
+      </p:sp>
+      <p:sp>
+        <p:nvSpPr>
+          <p:cNvPr id="115" name="矩形 114">
+            <a:extLst>
+              <a:ext uri="{FF2B5EF4-FFF2-40B4-BE49-F238E27FC236}">
+                <a16:creationId xmlns:a16="http://schemas.microsoft.com/office/drawing/2014/main" id="{61BEFF52-D38D-E3C6-DB45-682FA2FD9E73}"/>
+              </a:ext>
+            </a:extLst>
+          </p:cNvPr>
+          <p:cNvSpPr/>
+          <p:nvPr/>
+        </p:nvSpPr>
+        <p:spPr>
+          <a:xfrm flipV="1">
+            <a:off x="6771861" y="3070167"/>
+            <a:ext cx="264087" cy="21600"/>
+          </a:xfrm>
+          <a:prstGeom prst="rect">
+            <a:avLst/>
+          </a:prstGeom>
+          <a:solidFill>
+            <a:srgbClr val="618ADC"/>
+          </a:solidFill>
+          <a:ln>
+            <a:noFill/>
+          </a:ln>
+        </p:spPr>
+        <p:style>
+          <a:lnRef idx="2">
+            <a:schemeClr val="accent1">
+              <a:shade val="15000"/>
+            </a:schemeClr>
+          </a:lnRef>
+          <a:fillRef idx="1">
+            <a:schemeClr val="accent1"/>
+          </a:fillRef>
+          <a:effectRef idx="0">
+            <a:schemeClr val="accent1"/>
+          </a:effectRef>
+          <a:fontRef idx="minor">
+            <a:schemeClr val="lt1"/>
+          </a:fontRef>
+        </p:style>
+        <p:txBody>
+          <a:bodyPr rtlCol="0" anchor="ctr"/>
+          <a:lstStyle/>
+          <a:p>
+            <a:pPr algn="ctr"/>
+            <a:endParaRPr kumimoji="1" lang="zh-CN" altLang="en-US"/>
+          </a:p>
+        </p:txBody>
+      </p:sp>
+      <p:sp>
+        <p:nvSpPr>
+          <p:cNvPr id="116" name="矩形 115">
+            <a:extLst>
+              <a:ext uri="{FF2B5EF4-FFF2-40B4-BE49-F238E27FC236}">
+                <a16:creationId xmlns:a16="http://schemas.microsoft.com/office/drawing/2014/main" id="{732C853F-AB3C-35A3-30B4-407CC1B405F8}"/>
+              </a:ext>
+            </a:extLst>
+          </p:cNvPr>
+          <p:cNvSpPr/>
+          <p:nvPr/>
+        </p:nvSpPr>
+        <p:spPr>
+          <a:xfrm flipV="1">
+            <a:off x="6771861" y="2866062"/>
+            <a:ext cx="264087" cy="21600"/>
+          </a:xfrm>
+          <a:prstGeom prst="rect">
+            <a:avLst/>
+          </a:prstGeom>
+          <a:solidFill>
+            <a:srgbClr val="FF0000">
+              <a:alpha val="49904"/>
+            </a:srgbClr>
+          </a:solidFill>
+          <a:ln>
+            <a:noFill/>
+          </a:ln>
+        </p:spPr>
+        <p:style>
+          <a:lnRef idx="2">
+            <a:schemeClr val="accent1">
+              <a:shade val="15000"/>
+            </a:schemeClr>
+          </a:lnRef>
+          <a:fillRef idx="1">
+            <a:schemeClr val="accent1"/>
+          </a:fillRef>
+          <a:effectRef idx="0">
+            <a:schemeClr val="accent1"/>
+          </a:effectRef>
+          <a:fontRef idx="minor">
+            <a:schemeClr val="lt1"/>
+          </a:fontRef>
+        </p:style>
+        <p:txBody>
+          <a:bodyPr rtlCol="0" anchor="ctr"/>
+          <a:lstStyle/>
+          <a:p>
+            <a:pPr algn="ctr"/>
+            <a:endParaRPr kumimoji="1" lang="zh-CN" altLang="en-US"/>
+          </a:p>
+        </p:txBody>
+      </p:sp>
+      <p:sp>
+        <p:nvSpPr>
+          <p:cNvPr id="117" name="矩形 116">
+            <a:extLst>
+              <a:ext uri="{FF2B5EF4-FFF2-40B4-BE49-F238E27FC236}">
+                <a16:creationId xmlns:a16="http://schemas.microsoft.com/office/drawing/2014/main" id="{F902EBD4-BD1F-E229-0D58-BF396AF38432}"/>
+              </a:ext>
+            </a:extLst>
+          </p:cNvPr>
+          <p:cNvSpPr/>
+          <p:nvPr/>
+        </p:nvSpPr>
+        <p:spPr>
+          <a:xfrm flipV="1">
+            <a:off x="6771861" y="2968930"/>
+            <a:ext cx="264087" cy="21600"/>
+          </a:xfrm>
+          <a:prstGeom prst="rect">
+            <a:avLst/>
+          </a:prstGeom>
+          <a:solidFill>
+            <a:srgbClr val="FF0000">
+              <a:alpha val="49904"/>
+            </a:srgbClr>
+          </a:solidFill>
+          <a:ln>
+            <a:noFill/>
+          </a:ln>
+        </p:spPr>
+        <p:style>
+          <a:lnRef idx="2">
+            <a:schemeClr val="accent1">
+              <a:shade val="15000"/>
+            </a:schemeClr>
+          </a:lnRef>
+          <a:fillRef idx="1">
+            <a:schemeClr val="accent1"/>
+          </a:fillRef>
+          <a:effectRef idx="0">
+            <a:schemeClr val="accent1"/>
+          </a:effectRef>
+          <a:fontRef idx="minor">
+            <a:schemeClr val="lt1"/>
+          </a:fontRef>
+        </p:style>
+        <p:txBody>
+          <a:bodyPr rtlCol="0" anchor="ctr"/>
+          <a:lstStyle/>
+          <a:p>
+            <a:pPr algn="ctr"/>
+            <a:endParaRPr kumimoji="1" lang="zh-CN" altLang="en-US"/>
+          </a:p>
+        </p:txBody>
+      </p:sp>
+      <p:sp>
+        <p:nvSpPr>
+          <p:cNvPr id="118" name="矩形 117">
+            <a:extLst>
+              <a:ext uri="{FF2B5EF4-FFF2-40B4-BE49-F238E27FC236}">
+                <a16:creationId xmlns:a16="http://schemas.microsoft.com/office/drawing/2014/main" id="{A30A52F1-ED7D-FC7C-0150-0E4891BA1192}"/>
+              </a:ext>
+            </a:extLst>
+          </p:cNvPr>
+          <p:cNvSpPr/>
+          <p:nvPr/>
+        </p:nvSpPr>
+        <p:spPr>
+          <a:xfrm flipV="1">
+            <a:off x="6771861" y="3153449"/>
+            <a:ext cx="264087" cy="21600"/>
+          </a:xfrm>
+          <a:prstGeom prst="rect">
+            <a:avLst/>
+          </a:prstGeom>
+          <a:solidFill>
+            <a:srgbClr val="FF0000">
+              <a:alpha val="49904"/>
+            </a:srgbClr>
+          </a:solidFill>
+          <a:ln>
+            <a:noFill/>
+          </a:ln>
+        </p:spPr>
+        <p:style>
+          <a:lnRef idx="2">
+            <a:schemeClr val="accent1">
+              <a:shade val="15000"/>
+            </a:schemeClr>
+          </a:lnRef>
+          <a:fillRef idx="1">
+            <a:schemeClr val="accent1"/>
+          </a:fillRef>
+          <a:effectRef idx="0">
+            <a:schemeClr val="accent1"/>
+          </a:effectRef>
+          <a:fontRef idx="minor">
+            <a:schemeClr val="lt1"/>
+          </a:fontRef>
+        </p:style>
+        <p:txBody>
+          <a:bodyPr rtlCol="0" anchor="ctr"/>
+          <a:lstStyle/>
+          <a:p>
+            <a:pPr algn="ctr"/>
+            <a:endParaRPr kumimoji="1" lang="zh-CN" altLang="en-US"/>
+          </a:p>
+        </p:txBody>
+      </p:sp>
+      <p:cxnSp>
+        <p:nvCxnSpPr>
+          <p:cNvPr id="119" name="直线连接符 118">
+            <a:extLst>
+              <a:ext uri="{FF2B5EF4-FFF2-40B4-BE49-F238E27FC236}">
+                <a16:creationId xmlns:a16="http://schemas.microsoft.com/office/drawing/2014/main" id="{322BAC10-8A03-7F3E-606A-4131D00E9548}"/>
+              </a:ext>
+            </a:extLst>
+          </p:cNvPr>
+          <p:cNvCxnSpPr>
+            <a:cxnSpLocks/>
+            <a:stCxn id="65" idx="3"/>
+            <a:endCxn id="81" idx="1"/>
+          </p:cNvCxnSpPr>
+          <p:nvPr/>
+        </p:nvCxnSpPr>
+        <p:spPr>
+          <a:xfrm flipV="1">
+            <a:off x="6373751" y="1484231"/>
+            <a:ext cx="395913" cy="934483"/>
+          </a:xfrm>
+          <a:prstGeom prst="line">
+            <a:avLst/>
+          </a:prstGeom>
+          <a:ln w="19050">
+            <a:solidFill>
+              <a:srgbClr val="FF7600"/>
+            </a:solidFill>
+            <a:prstDash val="sysDash"/>
+            <a:headEnd type="none"/>
+            <a:tailEnd type="triangle"/>
+          </a:ln>
+        </p:spPr>
+        <p:style>
+          <a:lnRef idx="2">
+            <a:schemeClr val="accent1"/>
+          </a:lnRef>
+          <a:fillRef idx="0">
+            <a:schemeClr val="accent1"/>
+          </a:fillRef>
+          <a:effectRef idx="1">
+            <a:schemeClr val="accent1"/>
+          </a:effectRef>
+          <a:fontRef idx="minor">
+            <a:schemeClr val="tx1"/>
+          </a:fontRef>
+        </p:style>
+      </p:cxnSp>
+      <p:cxnSp>
+        <p:nvCxnSpPr>
+          <p:cNvPr id="121" name="直线连接符 120">
+            <a:extLst>
+              <a:ext uri="{FF2B5EF4-FFF2-40B4-BE49-F238E27FC236}">
+                <a16:creationId xmlns:a16="http://schemas.microsoft.com/office/drawing/2014/main" id="{980D9899-B353-F19F-3941-54F04628B07C}"/>
+              </a:ext>
+            </a:extLst>
+          </p:cNvPr>
+          <p:cNvCxnSpPr>
+            <a:cxnSpLocks/>
+            <a:stCxn id="65" idx="3"/>
+            <a:endCxn id="82" idx="1"/>
+          </p:cNvCxnSpPr>
+          <p:nvPr/>
+        </p:nvCxnSpPr>
+        <p:spPr>
+          <a:xfrm flipV="1">
+            <a:off x="6373751" y="2095734"/>
+            <a:ext cx="395233" cy="322980"/>
+          </a:xfrm>
+          <a:prstGeom prst="line">
+            <a:avLst/>
+          </a:prstGeom>
+          <a:ln w="19050">
+            <a:solidFill>
+              <a:srgbClr val="FF7600"/>
+            </a:solidFill>
+            <a:prstDash val="sysDash"/>
+            <a:headEnd type="none"/>
+            <a:tailEnd type="triangle"/>
+          </a:ln>
+        </p:spPr>
+        <p:style>
+          <a:lnRef idx="2">
+            <a:schemeClr val="accent1"/>
+          </a:lnRef>
+          <a:fillRef idx="0">
+            <a:schemeClr val="accent1"/>
+          </a:fillRef>
+          <a:effectRef idx="1">
+            <a:schemeClr val="accent1"/>
+          </a:effectRef>
+          <a:fontRef idx="minor">
+            <a:schemeClr val="tx1"/>
+          </a:fontRef>
+        </p:style>
+      </p:cxnSp>
+      <p:cxnSp>
+        <p:nvCxnSpPr>
+          <p:cNvPr id="123" name="直线连接符 122">
+            <a:extLst>
+              <a:ext uri="{FF2B5EF4-FFF2-40B4-BE49-F238E27FC236}">
+                <a16:creationId xmlns:a16="http://schemas.microsoft.com/office/drawing/2014/main" id="{540DBEEA-9A6B-A9CD-06DD-049B312D903A}"/>
+              </a:ext>
+            </a:extLst>
+          </p:cNvPr>
+          <p:cNvCxnSpPr>
+            <a:cxnSpLocks/>
+            <a:stCxn id="65" idx="3"/>
+            <a:endCxn id="83" idx="1"/>
+          </p:cNvCxnSpPr>
+          <p:nvPr/>
+        </p:nvCxnSpPr>
+        <p:spPr>
+          <a:xfrm>
+            <a:off x="6373751" y="2418714"/>
+            <a:ext cx="395625" cy="582721"/>
+          </a:xfrm>
+          <a:prstGeom prst="line">
+            <a:avLst/>
+          </a:prstGeom>
+          <a:ln w="19050">
+            <a:solidFill>
+              <a:srgbClr val="FF7600"/>
+            </a:solidFill>
+            <a:prstDash val="sysDash"/>
+            <a:headEnd type="none"/>
+            <a:tailEnd type="triangle"/>
+          </a:ln>
+        </p:spPr>
+        <p:style>
+          <a:lnRef idx="2">
+            <a:schemeClr val="accent1"/>
+          </a:lnRef>
+          <a:fillRef idx="0">
+            <a:schemeClr val="accent1"/>
+          </a:fillRef>
+          <a:effectRef idx="1">
+            <a:schemeClr val="accent1"/>
+          </a:effectRef>
+          <a:fontRef idx="minor">
+            <a:schemeClr val="tx1"/>
+          </a:fontRef>
+        </p:style>
+      </p:cxnSp>
+      <p:sp>
+        <p:nvSpPr>
+          <p:cNvPr id="128" name="右箭头 127">
+            <a:extLst>
+              <a:ext uri="{FF2B5EF4-FFF2-40B4-BE49-F238E27FC236}">
+                <a16:creationId xmlns:a16="http://schemas.microsoft.com/office/drawing/2014/main" id="{57ADFAC6-8FBA-87D0-5A49-58D789CADA2B}"/>
+              </a:ext>
+            </a:extLst>
+          </p:cNvPr>
+          <p:cNvSpPr/>
+          <p:nvPr/>
+        </p:nvSpPr>
+        <p:spPr>
+          <a:xfrm>
+            <a:off x="2771821" y="2173100"/>
+            <a:ext cx="256182" cy="144378"/>
+          </a:xfrm>
+          <a:prstGeom prst="rightArrow">
+            <a:avLst/>
+          </a:prstGeom>
+          <a:solidFill>
+            <a:schemeClr val="tx1"/>
+          </a:solidFill>
+          <a:ln>
+            <a:noFill/>
+          </a:ln>
+        </p:spPr>
+        <p:style>
+          <a:lnRef idx="2">
+            <a:schemeClr val="accent1">
+              <a:shade val="15000"/>
+            </a:schemeClr>
+          </a:lnRef>
+          <a:fillRef idx="1">
+            <a:schemeClr val="accent1"/>
+          </a:fillRef>
+          <a:effectRef idx="0">
+            <a:schemeClr val="accent1"/>
+          </a:effectRef>
+          <a:fontRef idx="minor">
+            <a:schemeClr val="lt1"/>
+          </a:fontRef>
+        </p:style>
+        <p:txBody>
+          <a:bodyPr rtlCol="0" anchor="ctr"/>
+          <a:lstStyle/>
+          <a:p>
+            <a:pPr algn="ctr"/>
+            <a:endParaRPr kumimoji="1" lang="zh-CN" altLang="en-US"/>
+          </a:p>
+        </p:txBody>
+      </p:sp>
+      <p:sp>
+        <p:nvSpPr>
+          <p:cNvPr id="129" name="矩形 128">
+            <a:extLst>
+              <a:ext uri="{FF2B5EF4-FFF2-40B4-BE49-F238E27FC236}">
+                <a16:creationId xmlns:a16="http://schemas.microsoft.com/office/drawing/2014/main" id="{DCAD48FF-B94F-3DEC-28A3-3274D00829B3}"/>
+              </a:ext>
+            </a:extLst>
+          </p:cNvPr>
+          <p:cNvSpPr/>
+          <p:nvPr/>
+        </p:nvSpPr>
+        <p:spPr>
+          <a:xfrm>
+            <a:off x="4498190" y="1589001"/>
+            <a:ext cx="239937" cy="1295246"/>
+          </a:xfrm>
+          <a:prstGeom prst="rect">
+            <a:avLst/>
+          </a:prstGeom>
+          <a:noFill/>
+          <a:ln w="25400">
+            <a:solidFill>
+              <a:srgbClr val="F640E3"/>
+            </a:solidFill>
+            <a:prstDash val="sysDash"/>
+          </a:ln>
+        </p:spPr>
+        <p:style>
+          <a:lnRef idx="2">
+            <a:schemeClr val="accent1">
+              <a:shade val="15000"/>
+            </a:schemeClr>
+          </a:lnRef>
+          <a:fillRef idx="1">
+            <a:schemeClr val="accent1"/>
+          </a:fillRef>
+          <a:effectRef idx="0">
+            <a:schemeClr val="accent1"/>
+          </a:effectRef>
+          <a:fontRef idx="minor">
+            <a:schemeClr val="lt1"/>
+          </a:fontRef>
+        </p:style>
+        <p:txBody>
+          <a:bodyPr rtlCol="0" anchor="ctr"/>
+          <a:lstStyle/>
+          <a:p>
+            <a:pPr algn="ctr"/>
+            <a:endParaRPr kumimoji="1" lang="zh-CN" altLang="en-US" dirty="0"/>
+          </a:p>
+        </p:txBody>
+      </p:sp>
+      <p:sp>
+        <p:nvSpPr>
+          <p:cNvPr id="133" name="矩形 132">
+            <a:extLst>
+              <a:ext uri="{FF2B5EF4-FFF2-40B4-BE49-F238E27FC236}">
+                <a16:creationId xmlns:a16="http://schemas.microsoft.com/office/drawing/2014/main" id="{B7B7D91F-8C6A-BB53-4B27-79951640C309}"/>
+              </a:ext>
+            </a:extLst>
+          </p:cNvPr>
+          <p:cNvSpPr/>
+          <p:nvPr/>
+        </p:nvSpPr>
+        <p:spPr>
+          <a:xfrm>
+            <a:off x="5771218" y="1878901"/>
+            <a:ext cx="599356" cy="1079614"/>
+          </a:xfrm>
+          <a:prstGeom prst="rect">
+            <a:avLst/>
+          </a:prstGeom>
+          <a:noFill/>
+          <a:ln w="25400">
+            <a:solidFill>
+              <a:srgbClr val="F640E3"/>
+            </a:solidFill>
+            <a:prstDash val="sysDash"/>
+          </a:ln>
+        </p:spPr>
+        <p:style>
+          <a:lnRef idx="2">
+            <a:schemeClr val="accent1">
+              <a:shade val="15000"/>
+            </a:schemeClr>
+          </a:lnRef>
+          <a:fillRef idx="1">
+            <a:schemeClr val="accent1"/>
+          </a:fillRef>
+          <a:effectRef idx="0">
+            <a:schemeClr val="accent1"/>
+          </a:effectRef>
+          <a:fontRef idx="minor">
+            <a:schemeClr val="lt1"/>
+          </a:fontRef>
+        </p:style>
+        <p:txBody>
+          <a:bodyPr rtlCol="0" anchor="ctr"/>
+          <a:lstStyle/>
+          <a:p>
+            <a:pPr algn="ctr"/>
+            <a:endParaRPr kumimoji="1" lang="zh-CN" altLang="en-US" dirty="0"/>
+          </a:p>
+        </p:txBody>
+      </p:sp>
+      <p:cxnSp>
+        <p:nvCxnSpPr>
+          <p:cNvPr id="135" name="直线连接符 134">
+            <a:extLst>
+              <a:ext uri="{FF2B5EF4-FFF2-40B4-BE49-F238E27FC236}">
+                <a16:creationId xmlns:a16="http://schemas.microsoft.com/office/drawing/2014/main" id="{1CFC2A98-678C-F121-E28E-E5768BF7A10E}"/>
+              </a:ext>
+            </a:extLst>
+          </p:cNvPr>
+          <p:cNvCxnSpPr>
+            <a:cxnSpLocks/>
+          </p:cNvCxnSpPr>
+          <p:nvPr/>
+        </p:nvCxnSpPr>
+        <p:spPr>
+          <a:xfrm>
+            <a:off x="4735919" y="1586597"/>
+            <a:ext cx="1024422" cy="293852"/>
+          </a:xfrm>
+          <a:prstGeom prst="line">
+            <a:avLst/>
+          </a:prstGeom>
+          <a:ln w="25400">
+            <a:solidFill>
+              <a:srgbClr val="F640E3"/>
+            </a:solidFill>
+            <a:prstDash val="sysDash"/>
+          </a:ln>
+        </p:spPr>
+        <p:style>
+          <a:lnRef idx="2">
+            <a:schemeClr val="accent1"/>
+          </a:lnRef>
+          <a:fillRef idx="0">
+            <a:schemeClr val="accent1"/>
+          </a:fillRef>
+          <a:effectRef idx="1">
+            <a:schemeClr val="accent1"/>
+          </a:effectRef>
+          <a:fontRef idx="minor">
+            <a:schemeClr val="tx1"/>
+          </a:fontRef>
+        </p:style>
+      </p:cxnSp>
+      <p:cxnSp>
+        <p:nvCxnSpPr>
+          <p:cNvPr id="139" name="直线连接符 138">
+            <a:extLst>
+              <a:ext uri="{FF2B5EF4-FFF2-40B4-BE49-F238E27FC236}">
+                <a16:creationId xmlns:a16="http://schemas.microsoft.com/office/drawing/2014/main" id="{CB0D8ACE-ABC4-4871-25DD-A75B30BF90F1}"/>
+              </a:ext>
+            </a:extLst>
+          </p:cNvPr>
+          <p:cNvCxnSpPr>
+            <a:cxnSpLocks/>
+          </p:cNvCxnSpPr>
+          <p:nvPr/>
+        </p:nvCxnSpPr>
+        <p:spPr>
+          <a:xfrm>
+            <a:off x="4745068" y="2891458"/>
+            <a:ext cx="1017629" cy="67057"/>
+          </a:xfrm>
+          <a:prstGeom prst="line">
+            <a:avLst/>
+          </a:prstGeom>
+          <a:ln w="25400">
+            <a:solidFill>
+              <a:srgbClr val="F640E3"/>
+            </a:solidFill>
+            <a:prstDash val="sysDash"/>
+          </a:ln>
+        </p:spPr>
+        <p:style>
+          <a:lnRef idx="2">
+            <a:schemeClr val="accent1"/>
+          </a:lnRef>
+          <a:fillRef idx="0">
+            <a:schemeClr val="accent1"/>
+          </a:fillRef>
+          <a:effectRef idx="1">
+            <a:schemeClr val="accent1"/>
+          </a:effectRef>
+          <a:fontRef idx="minor">
+            <a:schemeClr val="tx1"/>
+          </a:fontRef>
+        </p:style>
+      </p:cxnSp>
+      <p:sp>
+        <p:nvSpPr>
+          <p:cNvPr id="142" name="文本框 141">
+            <a:extLst>
+              <a:ext uri="{FF2B5EF4-FFF2-40B4-BE49-F238E27FC236}">
+                <a16:creationId xmlns:a16="http://schemas.microsoft.com/office/drawing/2014/main" id="{2B014995-1AEE-050A-00FA-60B971FCD7D9}"/>
+              </a:ext>
+            </a:extLst>
+          </p:cNvPr>
+          <p:cNvSpPr txBox="1"/>
+          <p:nvPr/>
+        </p:nvSpPr>
+        <p:spPr>
+          <a:xfrm>
+            <a:off x="6359849" y="943414"/>
+            <a:ext cx="1082348" cy="253916"/>
+          </a:xfrm>
+          <a:prstGeom prst="rect">
+            <a:avLst/>
+          </a:prstGeom>
+          <a:noFill/>
+        </p:spPr>
+        <p:txBody>
+          <a:bodyPr wrap="none" rtlCol="0">
+            <a:spAutoFit/>
+          </a:bodyPr>
+          <a:lstStyle/>
+          <a:p>
+            <a:r>
+              <a:rPr kumimoji="1" lang="en-US" altLang="zh-CN" sz="1050" dirty="0">
+                <a:latin typeface="Calisto MT" panose="02040603050505030304" pitchFamily="18" charset="0"/>
+              </a:rPr>
+              <a:t>Candidate pairs</a:t>
+            </a:r>
+            <a:endParaRPr kumimoji="1" lang="zh-CN" altLang="en-US" sz="1050" dirty="0">
+              <a:latin typeface="Calisto MT" panose="02040603050505030304" pitchFamily="18" charset="0"/>
+            </a:endParaRPr>
+          </a:p>
+        </p:txBody>
+      </p:sp>
+      <p:sp>
+        <p:nvSpPr>
+          <p:cNvPr id="143" name="右箭头 142">
+            <a:extLst>
+              <a:ext uri="{FF2B5EF4-FFF2-40B4-BE49-F238E27FC236}">
+                <a16:creationId xmlns:a16="http://schemas.microsoft.com/office/drawing/2014/main" id="{0E45DFA2-55D3-1A0B-CF2B-6E5DCE630D14}"/>
+              </a:ext>
+            </a:extLst>
+          </p:cNvPr>
+          <p:cNvSpPr/>
+          <p:nvPr/>
+        </p:nvSpPr>
+        <p:spPr>
+          <a:xfrm>
+            <a:off x="5392209" y="2298612"/>
+            <a:ext cx="256182" cy="144378"/>
+          </a:xfrm>
+          <a:prstGeom prst="rightArrow">
+            <a:avLst/>
+          </a:prstGeom>
+          <a:solidFill>
+            <a:schemeClr val="tx1"/>
+          </a:solidFill>
+          <a:ln>
+            <a:noFill/>
+          </a:ln>
+        </p:spPr>
+        <p:style>
+          <a:lnRef idx="2">
+            <a:schemeClr val="accent1">
+              <a:shade val="15000"/>
+            </a:schemeClr>
+          </a:lnRef>
+          <a:fillRef idx="1">
+            <a:schemeClr val="accent1"/>
+          </a:fillRef>
+          <a:effectRef idx="0">
+            <a:schemeClr val="accent1"/>
+          </a:effectRef>
+          <a:fontRef idx="minor">
+            <a:schemeClr val="lt1"/>
+          </a:fontRef>
+        </p:style>
+        <p:txBody>
+          <a:bodyPr rtlCol="0" anchor="ctr"/>
+          <a:lstStyle/>
+          <a:p>
+            <a:pPr algn="ctr"/>
+            <a:endParaRPr kumimoji="1" lang="zh-CN" altLang="en-US"/>
+          </a:p>
+        </p:txBody>
+      </p:sp>
+      <p:sp>
+        <p:nvSpPr>
+          <p:cNvPr id="144" name="右箭头 143">
+            <a:extLst>
+              <a:ext uri="{FF2B5EF4-FFF2-40B4-BE49-F238E27FC236}">
+                <a16:creationId xmlns:a16="http://schemas.microsoft.com/office/drawing/2014/main" id="{F9544A16-622B-80D2-3691-BF6D0B064BDF}"/>
+              </a:ext>
+            </a:extLst>
+          </p:cNvPr>
+          <p:cNvSpPr>
+            <a:spLocks noChangeAspect="1"/>
+          </p:cNvSpPr>
+          <p:nvPr/>
+        </p:nvSpPr>
+        <p:spPr>
+          <a:xfrm>
+            <a:off x="7135444" y="1467930"/>
+            <a:ext cx="148158" cy="83498"/>
+          </a:xfrm>
+          <a:prstGeom prst="rightArrow">
+            <a:avLst/>
+          </a:prstGeom>
+          <a:solidFill>
+            <a:schemeClr val="tx1"/>
+          </a:solidFill>
+          <a:ln>
+            <a:noFill/>
+          </a:ln>
+        </p:spPr>
+        <p:style>
+          <a:lnRef idx="2">
+            <a:schemeClr val="accent1">
+              <a:shade val="15000"/>
+            </a:schemeClr>
+          </a:lnRef>
+          <a:fillRef idx="1">
+            <a:schemeClr val="accent1"/>
+          </a:fillRef>
+          <a:effectRef idx="0">
+            <a:schemeClr val="accent1"/>
+          </a:effectRef>
+          <a:fontRef idx="minor">
+            <a:schemeClr val="lt1"/>
+          </a:fontRef>
+        </p:style>
+        <p:txBody>
+          <a:bodyPr rtlCol="0" anchor="ctr"/>
+          <a:lstStyle/>
+          <a:p>
+            <a:pPr algn="ctr"/>
+            <a:endParaRPr kumimoji="1" lang="zh-CN" altLang="en-US"/>
+          </a:p>
+        </p:txBody>
+      </p:sp>
+      <p:sp>
+        <p:nvSpPr>
+          <p:cNvPr id="145" name="右箭头 144">
+            <a:extLst>
+              <a:ext uri="{FF2B5EF4-FFF2-40B4-BE49-F238E27FC236}">
+                <a16:creationId xmlns:a16="http://schemas.microsoft.com/office/drawing/2014/main" id="{48743A63-48E5-10E0-FBC3-9D360621C008}"/>
+              </a:ext>
+            </a:extLst>
+          </p:cNvPr>
+          <p:cNvSpPr>
+            <a:spLocks noChangeAspect="1"/>
+          </p:cNvSpPr>
+          <p:nvPr/>
+        </p:nvSpPr>
+        <p:spPr>
+          <a:xfrm>
+            <a:off x="7135444" y="2057624"/>
+            <a:ext cx="148158" cy="83498"/>
+          </a:xfrm>
+          <a:prstGeom prst="rightArrow">
+            <a:avLst/>
+          </a:prstGeom>
+          <a:solidFill>
+            <a:schemeClr val="tx1"/>
+          </a:solidFill>
+          <a:ln>
+            <a:noFill/>
+          </a:ln>
+        </p:spPr>
+        <p:style>
+          <a:lnRef idx="2">
+            <a:schemeClr val="accent1">
+              <a:shade val="15000"/>
+            </a:schemeClr>
+          </a:lnRef>
+          <a:fillRef idx="1">
+            <a:schemeClr val="accent1"/>
+          </a:fillRef>
+          <a:effectRef idx="0">
+            <a:schemeClr val="accent1"/>
+          </a:effectRef>
+          <a:fontRef idx="minor">
+            <a:schemeClr val="lt1"/>
+          </a:fontRef>
+        </p:style>
+        <p:txBody>
+          <a:bodyPr rtlCol="0" anchor="ctr"/>
+          <a:lstStyle/>
+          <a:p>
+            <a:pPr algn="ctr"/>
+            <a:endParaRPr kumimoji="1" lang="zh-CN" altLang="en-US"/>
+          </a:p>
+        </p:txBody>
+      </p:sp>
+      <p:sp>
+        <p:nvSpPr>
+          <p:cNvPr id="146" name="右箭头 145">
+            <a:extLst>
+              <a:ext uri="{FF2B5EF4-FFF2-40B4-BE49-F238E27FC236}">
+                <a16:creationId xmlns:a16="http://schemas.microsoft.com/office/drawing/2014/main" id="{13E65DED-5F7A-FE71-0A52-B9C2541D69A3}"/>
+              </a:ext>
+            </a:extLst>
+          </p:cNvPr>
+          <p:cNvSpPr>
+            <a:spLocks noChangeAspect="1"/>
+          </p:cNvSpPr>
+          <p:nvPr/>
+        </p:nvSpPr>
+        <p:spPr>
+          <a:xfrm>
+            <a:off x="7135444" y="2972667"/>
+            <a:ext cx="148158" cy="83498"/>
+          </a:xfrm>
+          <a:prstGeom prst="rightArrow">
+            <a:avLst/>
+          </a:prstGeom>
+          <a:solidFill>
+            <a:schemeClr val="tx1"/>
+          </a:solidFill>
+          <a:ln>
+            <a:noFill/>
           </a:ln>
         </p:spPr>
         <p:style>
@@ -4915,4 +7873,319 @@
     </a:ext>
   </a:extLst>
 </a:theme>
+</file>
+
+<file path=ppt/theme/theme2.xml><?xml version="1.0" encoding="utf-8"?>
+<a:theme xmlns:a="http://schemas.openxmlformats.org/drawingml/2006/main" name="Office 主题​​">
+  <a:themeElements>
+    <a:clrScheme name="Office">
+      <a:dk1>
+        <a:sysClr val="windowText" lastClr="000000"/>
+      </a:dk1>
+      <a:lt1>
+        <a:sysClr val="window" lastClr="FFFFFF"/>
+      </a:lt1>
+      <a:dk2>
+        <a:srgbClr val="0E2841"/>
+      </a:dk2>
+      <a:lt2>
+        <a:srgbClr val="E8E8E8"/>
+      </a:lt2>
+      <a:accent1>
+        <a:srgbClr val="156082"/>
+      </a:accent1>
+      <a:accent2>
+        <a:srgbClr val="E97132"/>
+      </a:accent2>
+      <a:accent3>
+        <a:srgbClr val="196B24"/>
+      </a:accent3>
+      <a:accent4>
+        <a:srgbClr val="0F9ED5"/>
+      </a:accent4>
+      <a:accent5>
+        <a:srgbClr val="A02B93"/>
+      </a:accent5>
+      <a:accent6>
+        <a:srgbClr val="4EA72E"/>
+      </a:accent6>
+      <a:hlink>
+        <a:srgbClr val="467886"/>
+      </a:hlink>
+      <a:folHlink>
+        <a:srgbClr val="96607D"/>
+      </a:folHlink>
+    </a:clrScheme>
+    <a:fontScheme name="Office">
+      <a:majorFont>
+        <a:latin typeface="等线 Light" panose="02110004020202020204"/>
+        <a:ea typeface=""/>
+        <a:cs typeface=""/>
+        <a:font script="Jpan" typeface="游ゴシック Light"/>
+        <a:font script="Hang" typeface="맑은 고딕"/>
+        <a:font script="Hans" typeface="等线 Light"/>
+        <a:font script="Hant" typeface="新細明體"/>
+        <a:font script="Arab" typeface="Times New Roman"/>
+        <a:font script="Hebr" typeface="Times New Roman"/>
+        <a:font script="Thai" typeface="Angsana New"/>
+        <a:font script="Ethi" typeface="Nyala"/>
+        <a:font script="Beng" typeface="Vrinda"/>
+        <a:font script="Gujr" typeface="Shruti"/>
+        <a:font script="Khmr" typeface="MoolBoran"/>
+        <a:font script="Knda" typeface="Tunga"/>
+        <a:font script="Guru" typeface="Raavi"/>
+        <a:font script="Cans" typeface="Euphemia"/>
+        <a:font script="Cher" typeface="Plantagenet Cherokee"/>
+        <a:font script="Yiii" typeface="Microsoft Yi Baiti"/>
+        <a:font script="Tibt" typeface="Microsoft Himalaya"/>
+        <a:font script="Thaa" typeface="MV Boli"/>
+        <a:font script="Deva" typeface="Mangal"/>
+        <a:font script="Telu" typeface="Gautami"/>
+        <a:font script="Taml" typeface="Latha"/>
+        <a:font script="Syrc" typeface="Estrangelo Edessa"/>
+        <a:font script="Orya" typeface="Kalinga"/>
+        <a:font script="Mlym" typeface="Kartika"/>
+        <a:font script="Laoo" typeface="DokChampa"/>
+        <a:font script="Sinh" typeface="Iskoola Pota"/>
+        <a:font script="Mong" typeface="Mongolian Baiti"/>
+        <a:font script="Viet" typeface="Times New Roman"/>
+        <a:font script="Uigh" typeface="Microsoft Uighur"/>
+        <a:font script="Geor" typeface="Sylfaen"/>
+        <a:font script="Armn" typeface="Arial"/>
+        <a:font script="Bugi" typeface="Leelawadee UI"/>
+        <a:font script="Bopo" typeface="Microsoft JhengHei"/>
+        <a:font script="Java" typeface="Javanese Text"/>
+        <a:font script="Lisu" typeface="Segoe UI"/>
+        <a:font script="Mymr" typeface="Myanmar Text"/>
+        <a:font script="Nkoo" typeface="Ebrima"/>
+        <a:font script="Olck" typeface="Nirmala UI"/>
+        <a:font script="Osma" typeface="Ebrima"/>
+        <a:font script="Phag" typeface="Phagspa"/>
+        <a:font script="Syrn" typeface="Estrangelo Edessa"/>
+        <a:font script="Syrj" typeface="Estrangelo Edessa"/>
+        <a:font script="Syre" typeface="Estrangelo Edessa"/>
+        <a:font script="Sora" typeface="Nirmala UI"/>
+        <a:font script="Tale" typeface="Microsoft Tai Le"/>
+        <a:font script="Talu" typeface="Microsoft New Tai Lue"/>
+        <a:font script="Tfng" typeface="Ebrima"/>
+      </a:majorFont>
+      <a:minorFont>
+        <a:latin typeface="等线" panose="02110004020202020204"/>
+        <a:ea typeface=""/>
+        <a:cs typeface=""/>
+        <a:font script="Jpan" typeface="游ゴシック"/>
+        <a:font script="Hang" typeface="맑은 고딕"/>
+        <a:font script="Hans" typeface="等线"/>
+        <a:font script="Hant" typeface="新細明體"/>
+        <a:font script="Arab" typeface="Arial"/>
+        <a:font script="Hebr" typeface="Arial"/>
+        <a:font script="Thai" typeface="Cordia New"/>
+        <a:font script="Ethi" typeface="Nyala"/>
+        <a:font script="Beng" typeface="Vrinda"/>
+        <a:font script="Gujr" typeface="Shruti"/>
+        <a:font script="Khmr" typeface="DaunPenh"/>
+        <a:font script="Knda" typeface="Tunga"/>
+        <a:font script="Guru" typeface="Raavi"/>
+        <a:font script="Cans" typeface="Euphemia"/>
+        <a:font script="Cher" typeface="Plantagenet Cherokee"/>
+        <a:font script="Yiii" typeface="Microsoft Yi Baiti"/>
+        <a:font script="Tibt" typeface="Microsoft Himalaya"/>
+        <a:font script="Thaa" typeface="MV Boli"/>
+        <a:font script="Deva" typeface="Mangal"/>
+        <a:font script="Telu" typeface="Gautami"/>
+        <a:font script="Taml" typeface="Latha"/>
+        <a:font script="Syrc" typeface="Estrangelo Edessa"/>
+        <a:font script="Orya" typeface="Kalinga"/>
+        <a:font script="Mlym" typeface="Kartika"/>
+        <a:font script="Laoo" typeface="DokChampa"/>
+        <a:font script="Sinh" typeface="Iskoola Pota"/>
+        <a:font script="Mong" typeface="Mongolian Baiti"/>
+        <a:font script="Viet" typeface="Arial"/>
+        <a:font script="Uigh" typeface="Microsoft Uighur"/>
+        <a:font script="Geor" typeface="Sylfaen"/>
+        <a:font script="Armn" typeface="Arial"/>
+        <a:font script="Bugi" typeface="Leelawadee UI"/>
+        <a:font script="Bopo" typeface="Microsoft JhengHei"/>
+        <a:font script="Java" typeface="Javanese Text"/>
+        <a:font script="Lisu" typeface="Segoe UI"/>
+        <a:font script="Mymr" typeface="Myanmar Text"/>
+        <a:font script="Nkoo" typeface="Ebrima"/>
+        <a:font script="Olck" typeface="Nirmala UI"/>
+        <a:font script="Osma" typeface="Ebrima"/>
+        <a:font script="Phag" typeface="Phagspa"/>
+        <a:font script="Syrn" typeface="Estrangelo Edessa"/>
+        <a:font script="Syrj" typeface="Estrangelo Edessa"/>
+        <a:font script="Syre" typeface="Estrangelo Edessa"/>
+        <a:font script="Sora" typeface="Nirmala UI"/>
+        <a:font script="Tale" typeface="Microsoft Tai Le"/>
+        <a:font script="Talu" typeface="Microsoft New Tai Lue"/>
+        <a:font script="Tfng" typeface="Ebrima"/>
+      </a:minorFont>
+    </a:fontScheme>
+    <a:fmtScheme name="Office">
+      <a:fillStyleLst>
+        <a:solidFill>
+          <a:schemeClr val="phClr"/>
+        </a:solidFill>
+        <a:gradFill rotWithShape="1">
+          <a:gsLst>
+            <a:gs pos="0">
+              <a:schemeClr val="phClr">
+                <a:lumMod val="110000"/>
+                <a:satMod val="105000"/>
+                <a:tint val="67000"/>
+              </a:schemeClr>
+            </a:gs>
+            <a:gs pos="50000">
+              <a:schemeClr val="phClr">
+                <a:lumMod val="105000"/>
+                <a:satMod val="103000"/>
+                <a:tint val="73000"/>
+              </a:schemeClr>
+            </a:gs>
+            <a:gs pos="100000">
+              <a:schemeClr val="phClr">
+                <a:lumMod val="105000"/>
+                <a:satMod val="109000"/>
+                <a:tint val="81000"/>
+              </a:schemeClr>
+            </a:gs>
+          </a:gsLst>
+          <a:lin ang="5400000" scaled="0"/>
+        </a:gradFill>
+        <a:gradFill rotWithShape="1">
+          <a:gsLst>
+            <a:gs pos="0">
+              <a:schemeClr val="phClr">
+                <a:satMod val="103000"/>
+                <a:lumMod val="102000"/>
+                <a:tint val="94000"/>
+              </a:schemeClr>
+            </a:gs>
+            <a:gs pos="50000">
+              <a:schemeClr val="phClr">
+                <a:satMod val="110000"/>
+                <a:lumMod val="100000"/>
+                <a:shade val="100000"/>
+              </a:schemeClr>
+            </a:gs>
+            <a:gs pos="100000">
+              <a:schemeClr val="phClr">
+                <a:lumMod val="99000"/>
+                <a:satMod val="120000"/>
+                <a:shade val="78000"/>
+              </a:schemeClr>
+            </a:gs>
+          </a:gsLst>
+          <a:lin ang="5400000" scaled="0"/>
+        </a:gradFill>
+      </a:fillStyleLst>
+      <a:lnStyleLst>
+        <a:ln w="12700" cap="flat" cmpd="sng" algn="ctr">
+          <a:solidFill>
+            <a:schemeClr val="phClr"/>
+          </a:solidFill>
+          <a:prstDash val="solid"/>
+          <a:miter lim="800000"/>
+        </a:ln>
+        <a:ln w="19050" cap="flat" cmpd="sng" algn="ctr">
+          <a:solidFill>
+            <a:schemeClr val="phClr"/>
+          </a:solidFill>
+          <a:prstDash val="solid"/>
+          <a:miter lim="800000"/>
+        </a:ln>
+        <a:ln w="25400" cap="flat" cmpd="sng" algn="ctr">
+          <a:solidFill>
+            <a:schemeClr val="phClr"/>
+          </a:solidFill>
+          <a:prstDash val="solid"/>
+          <a:miter lim="800000"/>
+        </a:ln>
+      </a:lnStyleLst>
+      <a:effectStyleLst>
+        <a:effectStyle>
+          <a:effectLst/>
+        </a:effectStyle>
+        <a:effectStyle>
+          <a:effectLst/>
+        </a:effectStyle>
+        <a:effectStyle>
+          <a:effectLst>
+            <a:outerShdw blurRad="57150" dist="19050" dir="5400000" algn="ctr" rotWithShape="0">
+              <a:srgbClr val="000000">
+                <a:alpha val="63000"/>
+              </a:srgbClr>
+            </a:outerShdw>
+          </a:effectLst>
+        </a:effectStyle>
+      </a:effectStyleLst>
+      <a:bgFillStyleLst>
+        <a:solidFill>
+          <a:schemeClr val="phClr"/>
+        </a:solidFill>
+        <a:solidFill>
+          <a:schemeClr val="phClr">
+            <a:tint val="95000"/>
+            <a:satMod val="170000"/>
+          </a:schemeClr>
+        </a:solidFill>
+        <a:gradFill rotWithShape="1">
+          <a:gsLst>
+            <a:gs pos="0">
+              <a:schemeClr val="phClr">
+                <a:tint val="93000"/>
+                <a:satMod val="150000"/>
+                <a:shade val="98000"/>
+                <a:lumMod val="102000"/>
+              </a:schemeClr>
+            </a:gs>
+            <a:gs pos="50000">
+              <a:schemeClr val="phClr">
+                <a:tint val="98000"/>
+                <a:satMod val="130000"/>
+                <a:shade val="90000"/>
+                <a:lumMod val="103000"/>
+              </a:schemeClr>
+            </a:gs>
+            <a:gs pos="100000">
+              <a:schemeClr val="phClr">
+                <a:shade val="63000"/>
+                <a:satMod val="120000"/>
+              </a:schemeClr>
+            </a:gs>
+          </a:gsLst>
+          <a:lin ang="5400000" scaled="0"/>
+        </a:gradFill>
+      </a:bgFillStyleLst>
+    </a:fmtScheme>
+  </a:themeElements>
+  <a:objectDefaults>
+    <a:lnDef>
+      <a:spPr/>
+      <a:bodyPr/>
+      <a:lstStyle/>
+      <a:style>
+        <a:lnRef idx="2">
+          <a:schemeClr val="accent1"/>
+        </a:lnRef>
+        <a:fillRef idx="0">
+          <a:schemeClr val="accent1"/>
+        </a:fillRef>
+        <a:effectRef idx="1">
+          <a:schemeClr val="accent1"/>
+        </a:effectRef>
+        <a:fontRef idx="minor">
+          <a:schemeClr val="tx1"/>
+        </a:fontRef>
+      </a:style>
+    </a:lnDef>
+  </a:objectDefaults>
+  <a:extraClrSchemeLst/>
+  <a:extLst>
+    <a:ext uri="{05A4C25C-085E-4340-85A3-A5531E510DB2}">
+      <thm15:themeFamily xmlns:thm15="http://schemas.microsoft.com/office/thememl/2012/main" name="Office Theme" id="{2E142A2C-CD16-42D6-873A-C26D2A0506FA}" vid="{1BDDFF52-6CD6-40A5-AB3C-68EB2F1E4D0A}"/>
+    </a:ext>
+  </a:extLst>
+</a:theme>
 </file>